--- a/slides/NDC_260826_moro.pptx
+++ b/slides/NDC_260826_moro.pptx
@@ -1319,7 +1319,7 @@
           <a:p>
             <a:fld id="{D7A422DF-4847-4D6E-BB97-9B75D56F5D74}" type="datetimeFigureOut">
               <a:rPr lang="it-IT" smtClean="0"/>
-              <a:t>23/08/2026</a:t>
+              <a:t>25/08/2026</a:t>
             </a:fld>
             <a:endParaRPr lang="it-IT"/>
           </a:p>
@@ -4790,7 +4790,7 @@
           <a:p>
             <a:fld id="{4B734174-4AE7-4BE8-A29D-97641C0FB41A}" type="datetimeFigureOut">
               <a:rPr lang="it-IT" smtClean="0"/>
-              <a:t>23/08/2026</a:t>
+              <a:t>25/08/2026</a:t>
             </a:fld>
             <a:endParaRPr lang="it-IT"/>
           </a:p>
@@ -4988,7 +4988,7 @@
           <a:p>
             <a:fld id="{4B734174-4AE7-4BE8-A29D-97641C0FB41A}" type="datetimeFigureOut">
               <a:rPr lang="it-IT" smtClean="0"/>
-              <a:t>23/08/2026</a:t>
+              <a:t>25/08/2026</a:t>
             </a:fld>
             <a:endParaRPr lang="it-IT"/>
           </a:p>
@@ -5196,7 +5196,7 @@
           <a:p>
             <a:fld id="{4B734174-4AE7-4BE8-A29D-97641C0FB41A}" type="datetimeFigureOut">
               <a:rPr lang="it-IT" smtClean="0"/>
-              <a:t>23/08/2026</a:t>
+              <a:t>25/08/2026</a:t>
             </a:fld>
             <a:endParaRPr lang="it-IT"/>
           </a:p>
@@ -5394,7 +5394,7 @@
           <a:p>
             <a:fld id="{4B734174-4AE7-4BE8-A29D-97641C0FB41A}" type="datetimeFigureOut">
               <a:rPr lang="it-IT" smtClean="0"/>
-              <a:t>23/08/2026</a:t>
+              <a:t>25/08/2026</a:t>
             </a:fld>
             <a:endParaRPr lang="it-IT"/>
           </a:p>
@@ -5669,7 +5669,7 @@
           <a:p>
             <a:fld id="{4B734174-4AE7-4BE8-A29D-97641C0FB41A}" type="datetimeFigureOut">
               <a:rPr lang="it-IT" smtClean="0"/>
-              <a:t>23/08/2026</a:t>
+              <a:t>25/08/2026</a:t>
             </a:fld>
             <a:endParaRPr lang="it-IT"/>
           </a:p>
@@ -5934,7 +5934,7 @@
           <a:p>
             <a:fld id="{4B734174-4AE7-4BE8-A29D-97641C0FB41A}" type="datetimeFigureOut">
               <a:rPr lang="it-IT" smtClean="0"/>
-              <a:t>23/08/2026</a:t>
+              <a:t>25/08/2026</a:t>
             </a:fld>
             <a:endParaRPr lang="it-IT"/>
           </a:p>
@@ -6346,7 +6346,7 @@
           <a:p>
             <a:fld id="{4B734174-4AE7-4BE8-A29D-97641C0FB41A}" type="datetimeFigureOut">
               <a:rPr lang="it-IT" smtClean="0"/>
-              <a:t>23/08/2026</a:t>
+              <a:t>25/08/2026</a:t>
             </a:fld>
             <a:endParaRPr lang="it-IT"/>
           </a:p>
@@ -6487,7 +6487,7 @@
           <a:p>
             <a:fld id="{4B734174-4AE7-4BE8-A29D-97641C0FB41A}" type="datetimeFigureOut">
               <a:rPr lang="it-IT" smtClean="0"/>
-              <a:t>23/08/2026</a:t>
+              <a:t>25/08/2026</a:t>
             </a:fld>
             <a:endParaRPr lang="it-IT"/>
           </a:p>
@@ -6600,7 +6600,7 @@
           <a:p>
             <a:fld id="{4B734174-4AE7-4BE8-A29D-97641C0FB41A}" type="datetimeFigureOut">
               <a:rPr lang="it-IT" smtClean="0"/>
-              <a:t>23/08/2026</a:t>
+              <a:t>25/08/2026</a:t>
             </a:fld>
             <a:endParaRPr lang="it-IT"/>
           </a:p>
@@ -6911,7 +6911,7 @@
           <a:p>
             <a:fld id="{4B734174-4AE7-4BE8-A29D-97641C0FB41A}" type="datetimeFigureOut">
               <a:rPr lang="it-IT" smtClean="0"/>
-              <a:t>23/08/2026</a:t>
+              <a:t>25/08/2026</a:t>
             </a:fld>
             <a:endParaRPr lang="it-IT"/>
           </a:p>
@@ -7199,7 +7199,7 @@
           <a:p>
             <a:fld id="{4B734174-4AE7-4BE8-A29D-97641C0FB41A}" type="datetimeFigureOut">
               <a:rPr lang="it-IT" smtClean="0"/>
-              <a:t>23/08/2026</a:t>
+              <a:t>25/08/2026</a:t>
             </a:fld>
             <a:endParaRPr lang="it-IT"/>
           </a:p>
@@ -7440,7 +7440,7 @@
           <a:p>
             <a:fld id="{4B734174-4AE7-4BE8-A29D-97641C0FB41A}" type="datetimeFigureOut">
               <a:rPr lang="it-IT" smtClean="0"/>
-              <a:t>23/08/2026</a:t>
+              <a:t>25/08/2026</a:t>
             </a:fld>
             <a:endParaRPr lang="it-IT"/>
           </a:p>
@@ -8663,8 +8663,8 @@
           </a:prstGeom>
         </p:spPr>
       </p:pic>
-      <mc:AlternateContent xmlns:mc="http://schemas.openxmlformats.org/markup-compatibility/2006">
-        <mc:Choice xmlns:a14="http://schemas.microsoft.com/office/drawing/2010/main" Requires="a14">
+      <mc:AlternateContent xmlns:mc="http://schemas.openxmlformats.org/markup-compatibility/2006" xmlns:a14="http://schemas.microsoft.com/office/drawing/2010/main">
+        <mc:Choice Requires="a14">
           <p:sp>
             <p:nvSpPr>
               <p:cNvPr id="23" name="Segnaposto contenuto 2">
@@ -8796,7 +8796,7 @@
             </p:txBody>
           </p:sp>
         </mc:Choice>
-        <mc:Fallback>
+        <mc:Fallback xmlns="">
           <p:sp>
             <p:nvSpPr>
               <p:cNvPr id="23" name="Segnaposto contenuto 2">
@@ -11124,6 +11124,49 @@
           </p:txBody>
         </p:sp>
       </p:grpSp>
+      <p:sp>
+        <p:nvSpPr>
+          <p:cNvPr id="12" name="CasellaDiTesto 11">
+            <a:extLst>
+              <a:ext uri="{FF2B5EF4-FFF2-40B4-BE49-F238E27FC236}">
+                <a16:creationId xmlns:a16="http://schemas.microsoft.com/office/drawing/2014/main" id="{0B521B4F-4BE1-C183-AA7D-202159181FA5}"/>
+              </a:ext>
+            </a:extLst>
+          </p:cNvPr>
+          <p:cNvSpPr txBox="1"/>
+          <p:nvPr/>
+        </p:nvSpPr>
+        <p:spPr>
+          <a:xfrm>
+            <a:off x="7380601" y="3918794"/>
+            <a:ext cx="1229999" cy="707886"/>
+          </a:xfrm>
+          <a:prstGeom prst="rect">
+            <a:avLst/>
+          </a:prstGeom>
+          <a:noFill/>
+        </p:spPr>
+        <p:txBody>
+          <a:bodyPr wrap="square" rtlCol="0">
+            <a:spAutoFit/>
+          </a:bodyPr>
+          <a:lstStyle/>
+          <a:p>
+            <a:pPr algn="ctr"/>
+            <a:r>
+              <a:rPr lang="it-IT" sz="2000" i="1" dirty="0"/>
+              <a:t>gaussian</a:t>
+            </a:r>
+          </a:p>
+          <a:p>
+            <a:pPr algn="ctr"/>
+            <a:r>
+              <a:rPr lang="it-IT" sz="2000" i="1" dirty="0"/>
+              <a:t>fit</a:t>
+            </a:r>
+          </a:p>
+        </p:txBody>
+      </p:sp>
     </p:spTree>
     <p:extLst>
       <p:ext uri="{BB962C8B-B14F-4D97-AF65-F5344CB8AC3E}">
@@ -15825,7 +15868,7 @@
             </p:nvSpPr>
             <p:spPr>
               <a:xfrm>
-                <a:off x="838200" y="1401288"/>
+                <a:off x="838200" y="1183573"/>
                 <a:ext cx="10515600" cy="4776227"/>
               </a:xfrm>
             </p:spPr>
@@ -15840,15 +15883,7 @@
                 </a:pPr>
                 <a:r>
                   <a:rPr lang="it-IT" sz="2400" dirty="0"/>
-                  <a:t>        Set up </a:t>
-                </a:r>
-                <a:r>
-                  <a:rPr lang="it-IT" sz="2400" b="1" dirty="0"/>
-                  <a:t>a Geant4 simulation </a:t>
-                </a:r>
-                <a:r>
-                  <a:rPr lang="it-IT" sz="2400" dirty="0"/>
-                  <a:t>of the long crystals characterized in this analysis, reproducing the same geometry as the H8 setup.</a:t>
+                  <a:t>        </a:t>
                 </a:r>
               </a:p>
               <a:p>
@@ -15856,30 +15891,30 @@
                   <a:buNone/>
                 </a:pPr>
                 <a:r>
-                  <a:rPr lang="en-US" sz="2400" dirty="0"/>
-                  <a:t>        Geant4/BDSIM:</a:t>
+                  <a:rPr lang="it-IT" sz="2400" dirty="0"/>
+                  <a:t>	Set up a</a:t>
+                </a:r>
+                <a:r>
+                  <a:rPr lang="it-IT" sz="2400" b="1" dirty="0"/>
+                  <a:t> Geant4 (BDSIM) </a:t>
+                </a:r>
+                <a:r>
+                  <a:rPr lang="it-IT" sz="2400" dirty="0"/>
+                  <a:t>simulation</a:t>
+                </a:r>
+                <a:r>
+                  <a:rPr lang="it-IT" sz="2400" b="1" dirty="0"/>
+                  <a:t> </a:t>
+                </a:r>
+                <a:r>
+                  <a:rPr lang="it-IT" sz="2400" dirty="0"/>
+                  <a:t>of the long crystals.</a:t>
                 </a:r>
               </a:p>
               <a:p>
-                <a:pPr lvl="1"/>
-                <a:r>
-                  <a:rPr lang="en-US" dirty="0" err="1"/>
-                  <a:t>Xtrack</a:t>
-                </a:r>
-                <a:r>
-                  <a:rPr lang="en-US" dirty="0"/>
-                  <a:t> along the beamline</a:t>
-                </a:r>
-              </a:p>
-              <a:p>
-                <a:pPr lvl="1"/>
-                <a:r>
-                  <a:rPr lang="en-US" dirty="0"/>
-                  <a:t>Geant4 only for elements where there is interaction with matter (collimator, crystals,…)</a:t>
-                </a:r>
-              </a:p>
-              <a:p>
-                <a:pPr lvl="1"/>
+                <a:pPr marL="0" indent="0">
+                  <a:buNone/>
+                </a:pPr>
                 <a:endParaRPr lang="en-US" dirty="0"/>
               </a:p>
               <a:p>
@@ -15888,7 +15923,7 @@
                 </a:pPr>
                 <a:r>
                   <a:rPr lang="en-US" sz="2400" dirty="0"/>
-                  <a:t>        The actual data serve as a </a:t>
+                  <a:t>	The actual data serve as a </a:t>
                 </a:r>
                 <a:r>
                   <a:rPr lang="en-US" sz="2400" b="1" dirty="0"/>
@@ -15905,12 +15940,29 @@
                 </a:pPr>
                 <a:r>
                   <a:rPr lang="it-IT" sz="2400" dirty="0"/>
-                  <a:t>        The simulation reproduces the “ideal” channeling physics, without torsion or other imperfections </a:t>
+                  <a:t>	The simulation reproduces the channeling physics without 	imperfections (</a:t>
+                </a:r>
+                <a:r>
+                  <a:rPr lang="it-IT" sz="2400" b="1" dirty="0"/>
+                  <a:t>higher</a:t>
+                </a:r>
+                <a:r>
+                  <a:rPr lang="it-IT" sz="2400" dirty="0"/>
+                  <a:t> simulated efficiency).</a:t>
+                </a:r>
+              </a:p>
+              <a:p>
+                <a:pPr marL="0" indent="0">
+                  <a:buNone/>
+                </a:pPr>
+                <a:r>
+                  <a:rPr lang="it-IT" sz="2400" dirty="0"/>
+                  <a:t>	</a:t>
                 </a:r>
                 <a14:m>
                   <m:oMath xmlns:m="http://schemas.openxmlformats.org/officeDocument/2006/math">
                     <m:r>
-                      <a:rPr lang="en-US" sz="2400" b="0" i="1" smtClean="0">
+                      <a:rPr lang="it-IT" sz="2400" b="0" i="1" smtClean="0">
                         <a:latin typeface="Cambria Math" panose="02040503050406030204" pitchFamily="18" charset="0"/>
                       </a:rPr>
                       <m:t>→</m:t>
@@ -15919,24 +15971,14 @@
                 </a14:m>
                 <a:r>
                   <a:rPr lang="it-IT" sz="2400" dirty="0"/>
-                  <a:t> simulated </a:t>
+                  <a:t> Multiple Coulomb scattering will be added to simulated results based 	on empirical data, to benchmark simulation model.</a:t>
                 </a:r>
-                <a:r>
-                  <a:rPr lang="it-IT" sz="2400" b="1" dirty="0"/>
-                  <a:t>efficiency</a:t>
-                </a:r>
-                <a:r>
-                  <a:rPr lang="it-IT" sz="2400" dirty="0"/>
-                  <a:t> is expected to be </a:t>
-                </a:r>
-                <a:r>
-                  <a:rPr lang="it-IT" sz="2400" b="1" dirty="0"/>
-                  <a:t>higher</a:t>
-                </a:r>
-                <a:r>
-                  <a:rPr lang="it-IT" sz="2400" dirty="0"/>
-                  <a:t>.</a:t>
-                </a:r>
+              </a:p>
+              <a:p>
+                <a:pPr marL="0" indent="0">
+                  <a:buNone/>
+                </a:pPr>
+                <a:endParaRPr lang="it-IT" sz="2400" dirty="0"/>
               </a:p>
               <a:p>
                 <a:pPr marL="0" indent="0">
@@ -15944,7 +15986,7 @@
                 </a:pPr>
                 <a:r>
                   <a:rPr lang="en-US" sz="2400" dirty="0"/>
-                  <a:t>        The gap between the simulation and the data serves as a quantitative measure of the impact of torsion and other non-idealities.</a:t>
+                  <a:t>	The gap between the simulation and the data serves as a quantitative 	measure of the impact of torsion and other non-idealities.</a:t>
                 </a:r>
               </a:p>
             </p:txBody>
@@ -15969,13 +16011,13 @@
             </p:nvSpPr>
             <p:spPr>
               <a:xfrm>
-                <a:off x="838200" y="1401288"/>
+                <a:off x="838200" y="1183573"/>
                 <a:ext cx="10515600" cy="4776227"/>
               </a:xfrm>
               <a:blipFill>
                 <a:blip r:embed="rId3"/>
                 <a:stretch>
-                  <a:fillRect l="-928" t="-1660" b="-2299"/>
+                  <a:fillRect r="-1333" b="-383"/>
                 </a:stretch>
               </a:blipFill>
             </p:spPr>
@@ -16022,7 +16064,7 @@
         </p:blipFill>
         <p:spPr>
           <a:xfrm>
-            <a:off x="838200" y="1264830"/>
+            <a:off x="1101771" y="1532088"/>
             <a:ext cx="540000" cy="540000"/>
           </a:xfrm>
           <a:prstGeom prst="rect">
@@ -16058,43 +16100,7 @@
         </p:blipFill>
         <p:spPr>
           <a:xfrm>
-            <a:off x="838200" y="5295382"/>
-            <a:ext cx="540000" cy="540000"/>
-          </a:xfrm>
-          <a:prstGeom prst="rect">
-            <a:avLst/>
-          </a:prstGeom>
-        </p:spPr>
-      </p:pic>
-      <p:pic>
-        <p:nvPicPr>
-          <p:cNvPr id="22" name="Graphic 21" descr="Circles with arrows with solid fill">
-            <a:extLst>
-              <a:ext uri="{FF2B5EF4-FFF2-40B4-BE49-F238E27FC236}">
-                <a16:creationId xmlns:a16="http://schemas.microsoft.com/office/drawing/2014/main" id="{5B04CD08-680E-5457-E9EF-7E94686FDF78}"/>
-              </a:ext>
-            </a:extLst>
-          </p:cNvPr>
-          <p:cNvPicPr>
-            <a:picLocks noChangeAspect="1"/>
-          </p:cNvPicPr>
-          <p:nvPr/>
-        </p:nvPicPr>
-        <p:blipFill>
-          <a:blip>
-            <a:extLst>
-              <a:ext uri="{96DAC541-7B7A-43D3-8B79-37D633B846F1}">
-                <asvg:svgBlip xmlns:asvg="http://schemas.microsoft.com/office/drawing/2016/SVG/main" r:embed="rId6"/>
-              </a:ext>
-            </a:extLst>
-          </a:blip>
-          <a:stretch>
-            <a:fillRect/>
-          </a:stretch>
-        </p:blipFill>
-        <p:spPr>
-          <a:xfrm>
-            <a:off x="838200" y="2104013"/>
+            <a:off x="1101771" y="5195230"/>
             <a:ext cx="540000" cy="540000"/>
           </a:xfrm>
           <a:prstGeom prst="rect">
@@ -16120,7 +16126,7 @@
           <a:blip>
             <a:extLst>
               <a:ext uri="{96DAC541-7B7A-43D3-8B79-37D633B846F1}">
-                <asvg:svgBlip xmlns:asvg="http://schemas.microsoft.com/office/drawing/2016/SVG/main" r:embed="rId7"/>
+                <asvg:svgBlip xmlns:asvg="http://schemas.microsoft.com/office/drawing/2016/SVG/main" r:embed="rId6"/>
               </a:ext>
             </a:extLst>
           </a:blip>
@@ -16130,7 +16136,7 @@
         </p:blipFill>
         <p:spPr>
           <a:xfrm>
-            <a:off x="838200" y="4024690"/>
+            <a:off x="1101771" y="2516880"/>
             <a:ext cx="540000" cy="540000"/>
           </a:xfrm>
           <a:prstGeom prst="rect">
@@ -16156,7 +16162,7 @@
           <a:blip>
             <a:extLst>
               <a:ext uri="{96DAC541-7B7A-43D3-8B79-37D633B846F1}">
-                <asvg:svgBlip xmlns:asvg="http://schemas.microsoft.com/office/drawing/2016/SVG/main" r:embed="rId8"/>
+                <asvg:svgBlip xmlns:asvg="http://schemas.microsoft.com/office/drawing/2016/SVG/main" r:embed="rId7"/>
               </a:ext>
             </a:extLst>
           </a:blip>
@@ -16166,7 +16172,7 @@
         </p:blipFill>
         <p:spPr>
           <a:xfrm>
-            <a:off x="838200" y="4545657"/>
+            <a:off x="1101771" y="3147740"/>
             <a:ext cx="540000" cy="540000"/>
           </a:xfrm>
           <a:prstGeom prst="rect">
@@ -20856,8 +20862,8 @@
           </a:prstGeom>
         </p:spPr>
       </p:pic>
-      <mc:AlternateContent xmlns:mc="http://schemas.openxmlformats.org/markup-compatibility/2006" xmlns:a14="http://schemas.microsoft.com/office/drawing/2010/main">
-        <mc:Choice Requires="a14">
+      <mc:AlternateContent xmlns:mc="http://schemas.openxmlformats.org/markup-compatibility/2006">
+        <mc:Choice xmlns:a14="http://schemas.microsoft.com/office/drawing/2010/main" Requires="a14">
           <p:sp>
             <p:nvSpPr>
               <p:cNvPr id="14" name="Rectangle: Rounded Corners 13">
@@ -20970,10 +20976,19 @@
                       <a:schemeClr val="tx1"/>
                     </a:solidFill>
                   </a:rPr>
-                  <a:t>a particles enters the channel only if its incidence angle is within </a:t>
+                  <a:t>incident angle  </a:t>
                 </a:r>
                 <a14:m>
                   <m:oMath xmlns:m="http://schemas.openxmlformats.org/officeDocument/2006/math">
+                    <m:r>
+                      <a:rPr lang="it-IT">
+                        <a:solidFill>
+                          <a:schemeClr val="tx1"/>
+                        </a:solidFill>
+                        <a:latin typeface="Cambria Math" panose="02040503050406030204" pitchFamily="18" charset="0"/>
+                      </a:rPr>
+                      <m:t>&lt;</m:t>
+                    </m:r>
                     <m:r>
                       <a:rPr lang="en-US" b="0" i="1" smtClean="0">
                         <a:solidFill>
@@ -21028,14 +21043,11 @@
                     </m:sSub>
                   </m:oMath>
                 </a14:m>
-                <a:r>
-                  <a:rPr lang="en-US" b="0" dirty="0">
-                    <a:solidFill>
-                      <a:schemeClr val="tx1"/>
-                    </a:solidFill>
-                  </a:rPr>
-                  <a:t> of the crystal plane</a:t>
-                </a:r>
+                <a:endParaRPr lang="en-US" b="0" dirty="0">
+                  <a:solidFill>
+                    <a:schemeClr val="tx1"/>
+                  </a:solidFill>
+                </a:endParaRPr>
               </a:p>
               <a:p>
                 <a:pPr algn="ctr"/>
@@ -21115,7 +21127,7 @@
             </p:txBody>
           </p:sp>
         </mc:Choice>
-        <mc:Fallback xmlns="">
+        <mc:Fallback>
           <p:sp>
             <p:nvSpPr>
               <p:cNvPr id="14" name="Rectangle: Rounded Corners 13">
@@ -21143,7 +21155,7 @@
               <a:blipFill>
                 <a:blip r:embed="rId7"/>
                 <a:stretch>
-                  <a:fillRect t="-493"/>
+                  <a:fillRect/>
                 </a:stretch>
               </a:blipFill>
               <a:ln w="38100">
@@ -24123,7 +24135,7 @@
                   <a:schemeClr val="tx1"/>
                 </a:solidFill>
               </a:rPr>
-              <a:t>Bent crystals only used in collimation systems to deflect particles in the beam halo</a:t>
+              <a:t>Bent crystals used in collimation systems to deflect particles and for beam extraction</a:t>
             </a:r>
           </a:p>
         </p:txBody>
@@ -24931,8 +24943,8 @@
           </a:p>
         </p:txBody>
       </p:sp>
-      <mc:AlternateContent xmlns:mc="http://schemas.openxmlformats.org/markup-compatibility/2006">
-        <mc:Choice xmlns:a14="http://schemas.microsoft.com/office/drawing/2010/main" Requires="a14">
+      <mc:AlternateContent xmlns:mc="http://schemas.openxmlformats.org/markup-compatibility/2006" xmlns:a14="http://schemas.microsoft.com/office/drawing/2010/main">
+        <mc:Choice Requires="a14">
           <p:sp>
             <p:nvSpPr>
               <p:cNvPr id="14" name="Rettangolo con angoli arrotondati 8">
@@ -25098,7 +25110,7 @@
             </p:txBody>
           </p:sp>
         </mc:Choice>
-        <mc:Fallback>
+        <mc:Fallback xmlns="">
           <p:sp>
             <p:nvSpPr>
               <p:cNvPr id="14" name="Rettangolo con angoli arrotondati 8">
@@ -30098,8 +30110,8 @@
           </a:p>
         </p:txBody>
       </p:sp>
-      <mc:AlternateContent xmlns:mc="http://schemas.openxmlformats.org/markup-compatibility/2006">
-        <mc:Choice xmlns:a14="http://schemas.microsoft.com/office/drawing/2010/main" Requires="a14">
+      <mc:AlternateContent xmlns:mc="http://schemas.openxmlformats.org/markup-compatibility/2006" xmlns:a14="http://schemas.microsoft.com/office/drawing/2010/main">
+        <mc:Choice Requires="a14">
           <p:sp>
             <p:nvSpPr>
               <p:cNvPr id="24" name="Rettangolo con angoli arrotondati 6">
@@ -30246,7 +30258,7 @@
             </p:txBody>
           </p:sp>
         </mc:Choice>
-        <mc:Fallback>
+        <mc:Fallback xmlns="">
           <p:sp>
             <p:nvSpPr>
               <p:cNvPr id="24" name="Rettangolo con angoli arrotondati 6">

--- a/slides/NDC_260826_moro.pptx
+++ b/slides/NDC_260826_moro.pptx
@@ -15848,8 +15848,8 @@
           </a:p>
         </p:txBody>
       </p:sp>
-      <mc:AlternateContent xmlns:mc="http://schemas.openxmlformats.org/markup-compatibility/2006">
-        <mc:Choice xmlns:a14="http://schemas.microsoft.com/office/drawing/2010/main" Requires="a14">
+      <mc:AlternateContent xmlns:mc="http://schemas.openxmlformats.org/markup-compatibility/2006" xmlns:a14="http://schemas.microsoft.com/office/drawing/2010/main">
+        <mc:Choice Requires="a14">
           <p:sp>
             <p:nvSpPr>
               <p:cNvPr id="3" name="Segnaposto contenuto 2">
@@ -15992,7 +15992,7 @@
             </p:txBody>
           </p:sp>
         </mc:Choice>
-        <mc:Fallback>
+        <mc:Fallback xmlns="">
           <p:sp>
             <p:nvSpPr>
               <p:cNvPr id="3" name="Segnaposto contenuto 2">
@@ -20862,8 +20862,8 @@
           </a:prstGeom>
         </p:spPr>
       </p:pic>
-      <mc:AlternateContent xmlns:mc="http://schemas.openxmlformats.org/markup-compatibility/2006">
-        <mc:Choice xmlns:a14="http://schemas.microsoft.com/office/drawing/2010/main" Requires="a14">
+      <mc:AlternateContent xmlns:mc="http://schemas.openxmlformats.org/markup-compatibility/2006" xmlns:a14="http://schemas.microsoft.com/office/drawing/2010/main">
+        <mc:Choice Requires="a14">
           <p:sp>
             <p:nvSpPr>
               <p:cNvPr id="14" name="Rectangle: Rounded Corners 13">
@@ -21127,7 +21127,7 @@
             </p:txBody>
           </p:sp>
         </mc:Choice>
-        <mc:Fallback>
+        <mc:Fallback xmlns="">
           <p:sp>
             <p:nvSpPr>
               <p:cNvPr id="14" name="Rectangle: Rounded Corners 13">
@@ -24256,8 +24256,8 @@
           </a:p>
         </p:txBody>
       </p:sp>
-      <mc:AlternateContent xmlns:mc="http://schemas.openxmlformats.org/markup-compatibility/2006" xmlns:a14="http://schemas.microsoft.com/office/drawing/2010/main">
-        <mc:Choice Requires="a14">
+      <mc:AlternateContent xmlns:mc="http://schemas.openxmlformats.org/markup-compatibility/2006">
+        <mc:Choice xmlns:a14="http://schemas.microsoft.com/office/drawing/2010/main" Requires="a14">
           <p:sp>
             <p:nvSpPr>
               <p:cNvPr id="22" name="Rettangolo con angoli arrotondati 6">
@@ -24324,12 +24324,20 @@
               </a:p>
               <a:p>
                 <a:r>
+                  <a:rPr lang="en-US" sz="2000" b="1" dirty="0">
+                    <a:solidFill>
+                      <a:schemeClr val="tx1"/>
+                    </a:solidFill>
+                  </a:rPr>
+                  <a:t>ALADDIN</a:t>
+                </a:r>
+                <a:r>
                   <a:rPr lang="en-US" sz="2000" dirty="0">
                     <a:solidFill>
                       <a:schemeClr val="tx1"/>
                     </a:solidFill>
                   </a:rPr>
-                  <a:t>ALADDIN: </a:t>
+                  <a:t>: </a:t>
                 </a:r>
                 <a:r>
                   <a:rPr lang="it-IT" sz="2000" dirty="0">
@@ -24405,13 +24413,26 @@
                       <a:schemeClr val="tx1"/>
                     </a:solidFill>
                   </a:rPr>
-                  <a:t> particles to induce a strong deflection (spin precession)</a:t>
+                  <a:t> particles to induce a strong deflection (spin precession) and measure their </a:t>
                 </a:r>
+                <a:r>
+                  <a:rPr lang="en-US" sz="2000" b="1" dirty="0">
+                    <a:solidFill>
+                      <a:schemeClr val="tx1"/>
+                    </a:solidFill>
+                  </a:rPr>
+                  <a:t>dipole moment</a:t>
+                </a:r>
+                <a:endParaRPr lang="en-US" sz="2000" dirty="0">
+                  <a:solidFill>
+                    <a:schemeClr val="tx1"/>
+                  </a:solidFill>
+                </a:endParaRPr>
               </a:p>
             </p:txBody>
           </p:sp>
         </mc:Choice>
-        <mc:Fallback xmlns="">
+        <mc:Fallback>
           <p:sp>
             <p:nvSpPr>
               <p:cNvPr id="22" name="Rettangolo con angoli arrotondati 6">

--- a/slides/NDC_260826_moro.pptx
+++ b/slides/NDC_260826_moro.pptx
@@ -5,7 +5,7 @@
     <p:sldMasterId id="2147483648" r:id="rId1"/>
   </p:sldMasterIdLst>
   <p:notesMasterIdLst>
-    <p:notesMasterId r:id="rId24"/>
+    <p:notesMasterId r:id="rId25"/>
   </p:notesMasterIdLst>
   <p:sldIdLst>
     <p:sldId id="256" r:id="rId2"/>
@@ -24,12 +24,13 @@
     <p:sldId id="343" r:id="rId15"/>
     <p:sldId id="346" r:id="rId16"/>
     <p:sldId id="305" r:id="rId17"/>
-    <p:sldId id="335" r:id="rId18"/>
-    <p:sldId id="319" r:id="rId19"/>
-    <p:sldId id="303" r:id="rId20"/>
-    <p:sldId id="345" r:id="rId21"/>
-    <p:sldId id="306" r:id="rId22"/>
-    <p:sldId id="315" r:id="rId23"/>
+    <p:sldId id="348" r:id="rId18"/>
+    <p:sldId id="335" r:id="rId19"/>
+    <p:sldId id="319" r:id="rId20"/>
+    <p:sldId id="303" r:id="rId21"/>
+    <p:sldId id="345" r:id="rId22"/>
+    <p:sldId id="306" r:id="rId23"/>
+    <p:sldId id="315" r:id="rId24"/>
   </p:sldIdLst>
   <p:sldSz cx="12192000" cy="6858000"/>
   <p:notesSz cx="6858000" cy="9144000"/>
@@ -2433,7 +2434,7 @@
           <a:p>
             <a:fld id="{C205392F-55BF-4B8E-AF01-45F81C88C286}" type="slidenum">
               <a:rPr lang="it-IT" smtClean="0"/>
-              <a:t>19</a:t>
+              <a:t>20</a:t>
             </a:fld>
             <a:endParaRPr lang="it-IT"/>
           </a:p>
@@ -2541,7 +2542,7 @@
           <a:p>
             <a:fld id="{C205392F-55BF-4B8E-AF01-45F81C88C286}" type="slidenum">
               <a:rPr lang="it-IT" smtClean="0"/>
-              <a:t>20</a:t>
+              <a:t>21</a:t>
             </a:fld>
             <a:endParaRPr lang="it-IT"/>
           </a:p>
@@ -3045,7 +3046,7 @@
           <a:p>
             <a:fld id="{C205392F-55BF-4B8E-AF01-45F81C88C286}" type="slidenum">
               <a:rPr lang="it-IT" smtClean="0"/>
-              <a:t>21</a:t>
+              <a:t>22</a:t>
             </a:fld>
             <a:endParaRPr lang="it-IT"/>
           </a:p>
@@ -3312,7 +3313,7 @@
           <a:p>
             <a:fld id="{C205392F-55BF-4B8E-AF01-45F81C88C286}" type="slidenum">
               <a:rPr lang="it-IT" smtClean="0"/>
-              <a:t>22</a:t>
+              <a:t>23</a:t>
             </a:fld>
             <a:endParaRPr lang="it-IT"/>
           </a:p>
@@ -16235,7 +16236,7 @@
         <p:spPr>
           <a:xfrm>
             <a:off x="38100" y="69651"/>
-            <a:ext cx="12114000" cy="1153094"/>
+            <a:ext cx="12114000" cy="6718698"/>
           </a:xfrm>
           <a:prstGeom prst="roundRect">
             <a:avLst>
@@ -16256,8 +16257,20 @@
                   <a:srgbClr val="002060"/>
                 </a:solidFill>
               </a:rPr>
-              <a:t>	BACKUP SLIDES</a:t>
-            </a:r>
+              <a:t>	THANK YOU FOR THE ATTENTION!</a:t>
+            </a:r>
+            <a:br>
+              <a:rPr lang="it-IT" sz="4000" b="1" dirty="0">
+                <a:solidFill>
+                  <a:srgbClr val="002060"/>
+                </a:solidFill>
+              </a:rPr>
+            </a:br>
+            <a:endParaRPr lang="it-IT" sz="4000" b="1" dirty="0">
+              <a:solidFill>
+                <a:srgbClr val="002060"/>
+              </a:solidFill>
+            </a:endParaRPr>
           </a:p>
         </p:txBody>
       </p:sp>
@@ -16377,12 +16390,241 @@
           </a:p>
         </p:txBody>
       </p:sp>
+      <p:sp>
+        <p:nvSpPr>
+          <p:cNvPr id="13" name="CasellaDiTesto 12">
+            <a:extLst>
+              <a:ext uri="{FF2B5EF4-FFF2-40B4-BE49-F238E27FC236}">
+                <a16:creationId xmlns:a16="http://schemas.microsoft.com/office/drawing/2014/main" id="{4868D235-E176-E7CA-EEBD-17788382E362}"/>
+              </a:ext>
+            </a:extLst>
+          </p:cNvPr>
+          <p:cNvSpPr txBox="1"/>
+          <p:nvPr/>
+        </p:nvSpPr>
+        <p:spPr>
+          <a:xfrm>
+            <a:off x="3048886" y="3244334"/>
+            <a:ext cx="6097772" cy="369332"/>
+          </a:xfrm>
+          <a:prstGeom prst="rect">
+            <a:avLst/>
+          </a:prstGeom>
+          <a:noFill/>
+        </p:spPr>
+        <p:txBody>
+          <a:bodyPr wrap="square">
+            <a:spAutoFit/>
+          </a:bodyPr>
+          <a:lstStyle/>
+          <a:p>
+            <a:endParaRPr lang="it-IT" dirty="0"/>
+          </a:p>
+        </p:txBody>
+      </p:sp>
+    </p:spTree>
+    <p:extLst>
+      <p:ext uri="{BB962C8B-B14F-4D97-AF65-F5344CB8AC3E}">
+        <p14:creationId xmlns:p14="http://schemas.microsoft.com/office/powerpoint/2010/main" val="463478691"/>
+      </p:ext>
+    </p:extLst>
+  </p:cSld>
+  <p:clrMapOvr>
+    <a:masterClrMapping/>
+  </p:clrMapOvr>
+</p:sld>
+</file>
+
+<file path=ppt/slides/slide17.xml><?xml version="1.0" encoding="utf-8"?>
+<p:sld xmlns:a="http://schemas.openxmlformats.org/drawingml/2006/main" xmlns:r="http://schemas.openxmlformats.org/officeDocument/2006/relationships" xmlns:p="http://schemas.openxmlformats.org/presentationml/2006/main">
+  <p:cSld>
+    <p:spTree>
+      <p:nvGrpSpPr>
+        <p:cNvPr id="1" name="">
+          <a:extLst>
+            <a:ext uri="{FF2B5EF4-FFF2-40B4-BE49-F238E27FC236}">
+              <a16:creationId xmlns:a16="http://schemas.microsoft.com/office/drawing/2014/main" id="{76FC3EFE-792D-B2B2-EF14-5D94DC310702}"/>
+            </a:ext>
+          </a:extLst>
+        </p:cNvPr>
+        <p:cNvGrpSpPr/>
+        <p:nvPr/>
+      </p:nvGrpSpPr>
+      <p:grpSpPr>
+        <a:xfrm>
+          <a:off x="0" y="0"/>
+          <a:ext cx="0" cy="0"/>
+          <a:chOff x="0" y="0"/>
+          <a:chExt cx="0" cy="0"/>
+        </a:xfrm>
+      </p:grpSpPr>
+      <p:sp>
+        <p:nvSpPr>
+          <p:cNvPr id="2" name="Titolo 1">
+            <a:extLst>
+              <a:ext uri="{FF2B5EF4-FFF2-40B4-BE49-F238E27FC236}">
+                <a16:creationId xmlns:a16="http://schemas.microsoft.com/office/drawing/2014/main" id="{397089C3-A0A9-85F2-B393-EACB369FB7C7}"/>
+              </a:ext>
+            </a:extLst>
+          </p:cNvPr>
+          <p:cNvSpPr>
+            <a:spLocks noGrp="1"/>
+          </p:cNvSpPr>
+          <p:nvPr>
+            <p:ph type="title"/>
+          </p:nvPr>
+        </p:nvSpPr>
+        <p:spPr>
+          <a:xfrm>
+            <a:off x="38100" y="69651"/>
+            <a:ext cx="12114000" cy="1153094"/>
+          </a:xfrm>
+          <a:prstGeom prst="roundRect">
+            <a:avLst>
+              <a:gd name="adj" fmla="val 36459"/>
+            </a:avLst>
+          </a:prstGeom>
+          <a:noFill/>
+        </p:spPr>
+        <p:txBody>
+          <a:bodyPr>
+            <a:normAutofit/>
+          </a:bodyPr>
+          <a:lstStyle/>
+          <a:p>
+            <a:r>
+              <a:rPr lang="it-IT" sz="4000" b="1" dirty="0">
+                <a:solidFill>
+                  <a:srgbClr val="002060"/>
+                </a:solidFill>
+              </a:rPr>
+              <a:t>	BACKUP SLIDES</a:t>
+            </a:r>
+          </a:p>
+        </p:txBody>
+      </p:sp>
+      <p:sp>
+        <p:nvSpPr>
+          <p:cNvPr id="4" name="Segnaposto data 3">
+            <a:extLst>
+              <a:ext uri="{FF2B5EF4-FFF2-40B4-BE49-F238E27FC236}">
+                <a16:creationId xmlns:a16="http://schemas.microsoft.com/office/drawing/2014/main" id="{11FF7ECB-D5FA-4CFF-43BF-98A6E4AEDC67}"/>
+              </a:ext>
+            </a:extLst>
+          </p:cNvPr>
+          <p:cNvSpPr>
+            <a:spLocks noGrp="1"/>
+          </p:cNvSpPr>
+          <p:nvPr>
+            <p:ph type="dt" sz="half" idx="10"/>
+          </p:nvPr>
+        </p:nvSpPr>
+        <p:spPr>
+          <a:xfrm>
+            <a:off x="838200" y="6356349"/>
+            <a:ext cx="2743200" cy="432000"/>
+          </a:xfrm>
+        </p:spPr>
+        <p:txBody>
+          <a:bodyPr/>
+          <a:lstStyle/>
+          <a:p>
+            <a:r>
+              <a:rPr lang="it-IT" sz="1500" b="1" dirty="0">
+                <a:solidFill>
+                  <a:srgbClr val="002060"/>
+                </a:solidFill>
+              </a:rPr>
+              <a:t>26.08.2026</a:t>
+            </a:r>
+          </a:p>
+        </p:txBody>
+      </p:sp>
+      <p:sp>
+        <p:nvSpPr>
+          <p:cNvPr id="5" name="Segnaposto piè di pagina 4">
+            <a:extLst>
+              <a:ext uri="{FF2B5EF4-FFF2-40B4-BE49-F238E27FC236}">
+                <a16:creationId xmlns:a16="http://schemas.microsoft.com/office/drawing/2014/main" id="{D01E4D72-FF4D-FDAB-B76C-B23E6245D7B9}"/>
+              </a:ext>
+            </a:extLst>
+          </p:cNvPr>
+          <p:cNvSpPr>
+            <a:spLocks noGrp="1"/>
+          </p:cNvSpPr>
+          <p:nvPr>
+            <p:ph type="ftr" sz="quarter" idx="11"/>
+          </p:nvPr>
+        </p:nvSpPr>
+        <p:spPr>
+          <a:xfrm>
+            <a:off x="0" y="6356349"/>
+            <a:ext cx="12192000" cy="432000"/>
+          </a:xfrm>
+        </p:spPr>
+        <p:txBody>
+          <a:bodyPr/>
+          <a:lstStyle/>
+          <a:p>
+            <a:r>
+              <a:rPr lang="it-IT" sz="1500" b="1" dirty="0">
+                <a:solidFill>
+                  <a:srgbClr val="002060"/>
+                </a:solidFill>
+              </a:rPr>
+              <a:t>Anna Sofia Moro</a:t>
+            </a:r>
+          </a:p>
+        </p:txBody>
+      </p:sp>
+      <p:sp>
+        <p:nvSpPr>
+          <p:cNvPr id="6" name="Segnaposto numero diapositiva 5">
+            <a:extLst>
+              <a:ext uri="{FF2B5EF4-FFF2-40B4-BE49-F238E27FC236}">
+                <a16:creationId xmlns:a16="http://schemas.microsoft.com/office/drawing/2014/main" id="{690DF88F-5CEF-22AA-D10B-5FF0C81DB93D}"/>
+              </a:ext>
+            </a:extLst>
+          </p:cNvPr>
+          <p:cNvSpPr>
+            <a:spLocks noGrp="1"/>
+          </p:cNvSpPr>
+          <p:nvPr>
+            <p:ph type="sldNum" sz="quarter" idx="12"/>
+          </p:nvPr>
+        </p:nvSpPr>
+        <p:spPr>
+          <a:xfrm>
+            <a:off x="8610600" y="6356349"/>
+            <a:ext cx="2743200" cy="432000"/>
+          </a:xfrm>
+        </p:spPr>
+        <p:txBody>
+          <a:bodyPr/>
+          <a:lstStyle/>
+          <a:p>
+            <a:fld id="{0A318BD9-CA14-4A83-ACF0-03D5918EB402}" type="slidenum">
+              <a:rPr lang="it-IT" sz="1500" b="1" smtClean="0">
+                <a:solidFill>
+                  <a:srgbClr val="002060"/>
+                </a:solidFill>
+              </a:rPr>
+              <a:t>17</a:t>
+            </a:fld>
+            <a:endParaRPr lang="it-IT" sz="1500" b="1" dirty="0">
+              <a:solidFill>
+                <a:srgbClr val="002060"/>
+              </a:solidFill>
+            </a:endParaRPr>
+          </a:p>
+        </p:txBody>
+      </p:sp>
       <p:cxnSp>
         <p:nvCxnSpPr>
           <p:cNvPr id="10" name="Connettore diritto 9">
             <a:extLst>
               <a:ext uri="{FF2B5EF4-FFF2-40B4-BE49-F238E27FC236}">
-                <a16:creationId xmlns:a16="http://schemas.microsoft.com/office/drawing/2014/main" id="{19CCD89B-D23E-B601-CB0F-35F735A548A8}"/>
+                <a16:creationId xmlns:a16="http://schemas.microsoft.com/office/drawing/2014/main" id="{19943E8D-6701-9E40-F364-C3FE635BF764}"/>
               </a:ext>
             </a:extLst>
           </p:cNvPr>
@@ -16425,7 +16667,7 @@
           <p:cNvPr id="13" name="CasellaDiTesto 12">
             <a:extLst>
               <a:ext uri="{FF2B5EF4-FFF2-40B4-BE49-F238E27FC236}">
-                <a16:creationId xmlns:a16="http://schemas.microsoft.com/office/drawing/2014/main" id="{4868D235-E176-E7CA-EEBD-17788382E362}"/>
+                <a16:creationId xmlns:a16="http://schemas.microsoft.com/office/drawing/2014/main" id="{753F558B-0342-DDA0-275B-A0DDDCE8170B}"/>
               </a:ext>
             </a:extLst>
           </p:cNvPr>
@@ -16457,7 +16699,7 @@
           <p:cNvPr id="15" name="CasellaDiTesto 14">
             <a:extLst>
               <a:ext uri="{FF2B5EF4-FFF2-40B4-BE49-F238E27FC236}">
-                <a16:creationId xmlns:a16="http://schemas.microsoft.com/office/drawing/2014/main" id="{BB2D0B5E-0AD3-1AC2-900A-351764AC43C1}"/>
+                <a16:creationId xmlns:a16="http://schemas.microsoft.com/office/drawing/2014/main" id="{ABED5F8B-4FA3-8614-B03D-E4A3BADC05EB}"/>
               </a:ext>
             </a:extLst>
           </p:cNvPr>
@@ -16487,7 +16729,7 @@
     </p:spTree>
     <p:extLst>
       <p:ext uri="{BB962C8B-B14F-4D97-AF65-F5344CB8AC3E}">
-        <p14:creationId xmlns:p14="http://schemas.microsoft.com/office/powerpoint/2010/main" val="463478691"/>
+        <p14:creationId xmlns:p14="http://schemas.microsoft.com/office/powerpoint/2010/main" val="936979746"/>
       </p:ext>
     </p:extLst>
   </p:cSld>
@@ -16497,7 +16739,7 @@
 </p:sld>
 </file>
 
-<file path=ppt/slides/slide17.xml><?xml version="1.0" encoding="utf-8"?>
+<file path=ppt/slides/slide18.xml><?xml version="1.0" encoding="utf-8"?>
 <p:sld xmlns:a="http://schemas.openxmlformats.org/drawingml/2006/main" xmlns:r="http://schemas.openxmlformats.org/officeDocument/2006/relationships" xmlns:p="http://schemas.openxmlformats.org/presentationml/2006/main">
   <p:cSld>
     <p:spTree>
@@ -16671,7 +16913,7 @@
                   <a:srgbClr val="002060"/>
                 </a:solidFill>
               </a:rPr>
-              <a:t>17</a:t>
+              <a:t>18</a:t>
             </a:fld>
             <a:endParaRPr lang="it-IT" sz="1500" b="1" dirty="0">
               <a:solidFill>
@@ -18570,7 +18812,7 @@
 </p:sld>
 </file>
 
-<file path=ppt/slides/slide18.xml><?xml version="1.0" encoding="utf-8"?>
+<file path=ppt/slides/slide19.xml><?xml version="1.0" encoding="utf-8"?>
 <p:sld xmlns:a="http://schemas.openxmlformats.org/drawingml/2006/main" xmlns:r="http://schemas.openxmlformats.org/officeDocument/2006/relationships" xmlns:p="http://schemas.openxmlformats.org/presentationml/2006/main">
   <p:cSld>
     <p:spTree>
@@ -18744,7 +18986,7 @@
                   <a:srgbClr val="002060"/>
                 </a:solidFill>
               </a:rPr>
-              <a:t>18</a:t>
+              <a:t>19</a:t>
             </a:fld>
             <a:endParaRPr lang="it-IT" sz="1500" b="1" dirty="0">
               <a:solidFill>
@@ -18991,7 +19233,860 @@
 </p:sld>
 </file>
 
-<file path=ppt/slides/slide19.xml><?xml version="1.0" encoding="utf-8"?>
+<file path=ppt/slides/slide2.xml><?xml version="1.0" encoding="utf-8"?>
+<p:sld xmlns:a="http://schemas.openxmlformats.org/drawingml/2006/main" xmlns:r="http://schemas.openxmlformats.org/officeDocument/2006/relationships" xmlns:p="http://schemas.openxmlformats.org/presentationml/2006/main">
+  <p:cSld>
+    <p:spTree>
+      <p:nvGrpSpPr>
+        <p:cNvPr id="1" name=""/>
+        <p:cNvGrpSpPr/>
+        <p:nvPr/>
+      </p:nvGrpSpPr>
+      <p:grpSpPr>
+        <a:xfrm>
+          <a:off x="0" y="0"/>
+          <a:ext cx="0" cy="0"/>
+          <a:chOff x="0" y="0"/>
+          <a:chExt cx="0" cy="0"/>
+        </a:xfrm>
+      </p:grpSpPr>
+      <p:sp>
+        <p:nvSpPr>
+          <p:cNvPr id="2" name="Titolo 1">
+            <a:extLst>
+              <a:ext uri="{FF2B5EF4-FFF2-40B4-BE49-F238E27FC236}">
+                <a16:creationId xmlns:a16="http://schemas.microsoft.com/office/drawing/2014/main" id="{C2EC8513-F988-C98D-D333-B6789C129AFF}"/>
+              </a:ext>
+            </a:extLst>
+          </p:cNvPr>
+          <p:cNvSpPr>
+            <a:spLocks noGrp="1"/>
+          </p:cNvSpPr>
+          <p:nvPr>
+            <p:ph type="title"/>
+          </p:nvPr>
+        </p:nvSpPr>
+        <p:spPr>
+          <a:xfrm>
+            <a:off x="38100" y="69651"/>
+            <a:ext cx="12114000" cy="1153094"/>
+          </a:xfrm>
+          <a:prstGeom prst="roundRect">
+            <a:avLst>
+              <a:gd name="adj" fmla="val 36459"/>
+            </a:avLst>
+          </a:prstGeom>
+          <a:noFill/>
+        </p:spPr>
+        <p:txBody>
+          <a:bodyPr>
+            <a:normAutofit/>
+          </a:bodyPr>
+          <a:lstStyle/>
+          <a:p>
+            <a:r>
+              <a:rPr lang="en-US" sz="4000" b="1" dirty="0">
+                <a:solidFill>
+                  <a:srgbClr val="002060"/>
+                </a:solidFill>
+              </a:rPr>
+              <a:t>	WHAT IS ‘CHANNELING’ IN CRYSTALS?</a:t>
+            </a:r>
+            <a:endParaRPr lang="it-IT" sz="4000" b="1" dirty="0">
+              <a:solidFill>
+                <a:srgbClr val="002060"/>
+              </a:solidFill>
+            </a:endParaRPr>
+          </a:p>
+        </p:txBody>
+      </p:sp>
+      <p:sp>
+        <p:nvSpPr>
+          <p:cNvPr id="3" name="Segnaposto contenuto 2">
+            <a:extLst>
+              <a:ext uri="{FF2B5EF4-FFF2-40B4-BE49-F238E27FC236}">
+                <a16:creationId xmlns:a16="http://schemas.microsoft.com/office/drawing/2014/main" id="{D705E017-952C-14B0-9906-4510932BCA3F}"/>
+              </a:ext>
+            </a:extLst>
+          </p:cNvPr>
+          <p:cNvSpPr>
+            <a:spLocks noGrp="1"/>
+          </p:cNvSpPr>
+          <p:nvPr>
+            <p:ph idx="1"/>
+          </p:nvPr>
+        </p:nvSpPr>
+        <p:spPr>
+          <a:xfrm>
+            <a:off x="838200" y="1401288"/>
+            <a:ext cx="6460067" cy="4776227"/>
+          </a:xfrm>
+        </p:spPr>
+        <p:txBody>
+          <a:bodyPr>
+            <a:normAutofit/>
+          </a:bodyPr>
+          <a:lstStyle/>
+          <a:p>
+            <a:r>
+              <a:rPr lang="it-IT" sz="2000" i="1" dirty="0"/>
+              <a:t>Channeling effect</a:t>
+            </a:r>
+          </a:p>
+          <a:p>
+            <a:pPr marL="0" indent="0">
+              <a:buNone/>
+            </a:pPr>
+            <a:r>
+              <a:rPr lang="it-IT" sz="2000" dirty="0"/>
+              <a:t>Charged particles get trapped and guided between regular atomic planes</a:t>
+            </a:r>
+          </a:p>
+          <a:p>
+            <a:r>
+              <a:rPr lang="it-IT" sz="2000" i="1" dirty="0"/>
+              <a:t>Beam deflection</a:t>
+            </a:r>
+          </a:p>
+          <a:p>
+            <a:pPr marL="0" indent="0">
+              <a:buNone/>
+            </a:pPr>
+            <a:r>
+              <a:rPr lang="it-IT" sz="2000" dirty="0"/>
+              <a:t>Bending the crystal physically steers the beam’s trajectory</a:t>
+            </a:r>
+          </a:p>
+          <a:p>
+            <a:r>
+              <a:rPr lang="it-IT" sz="2000" i="1" dirty="0"/>
+              <a:t>Advantage</a:t>
+            </a:r>
+          </a:p>
+          <a:p>
+            <a:pPr marL="0" indent="0">
+              <a:buNone/>
+            </a:pPr>
+            <a:r>
+              <a:rPr lang="it-IT" sz="2000" dirty="0"/>
+              <a:t>A compact alternative to traditional magnets for deflecting or extracting beams</a:t>
+            </a:r>
+          </a:p>
+        </p:txBody>
+      </p:sp>
+      <p:sp>
+        <p:nvSpPr>
+          <p:cNvPr id="4" name="Segnaposto data 3">
+            <a:extLst>
+              <a:ext uri="{FF2B5EF4-FFF2-40B4-BE49-F238E27FC236}">
+                <a16:creationId xmlns:a16="http://schemas.microsoft.com/office/drawing/2014/main" id="{A9CBEBE7-5AD1-2A5D-D796-FC860CFACB62}"/>
+              </a:ext>
+            </a:extLst>
+          </p:cNvPr>
+          <p:cNvSpPr>
+            <a:spLocks noGrp="1"/>
+          </p:cNvSpPr>
+          <p:nvPr>
+            <p:ph type="dt" sz="half" idx="10"/>
+          </p:nvPr>
+        </p:nvSpPr>
+        <p:spPr>
+          <a:xfrm>
+            <a:off x="838200" y="6356349"/>
+            <a:ext cx="2743200" cy="432000"/>
+          </a:xfrm>
+        </p:spPr>
+        <p:txBody>
+          <a:bodyPr/>
+          <a:lstStyle/>
+          <a:p>
+            <a:r>
+              <a:rPr lang="it-IT" sz="1500" b="1" dirty="0">
+                <a:solidFill>
+                  <a:srgbClr val="002060"/>
+                </a:solidFill>
+              </a:rPr>
+              <a:t>26.08.2026</a:t>
+            </a:r>
+          </a:p>
+        </p:txBody>
+      </p:sp>
+      <p:sp>
+        <p:nvSpPr>
+          <p:cNvPr id="5" name="Segnaposto piè di pagina 4">
+            <a:extLst>
+              <a:ext uri="{FF2B5EF4-FFF2-40B4-BE49-F238E27FC236}">
+                <a16:creationId xmlns:a16="http://schemas.microsoft.com/office/drawing/2014/main" id="{D65DDE3E-B94E-09A0-E6FC-740927746D9E}"/>
+              </a:ext>
+            </a:extLst>
+          </p:cNvPr>
+          <p:cNvSpPr>
+            <a:spLocks noGrp="1"/>
+          </p:cNvSpPr>
+          <p:nvPr>
+            <p:ph type="ftr" sz="quarter" idx="11"/>
+          </p:nvPr>
+        </p:nvSpPr>
+        <p:spPr>
+          <a:xfrm>
+            <a:off x="0" y="6356349"/>
+            <a:ext cx="12192000" cy="432000"/>
+          </a:xfrm>
+        </p:spPr>
+        <p:txBody>
+          <a:bodyPr/>
+          <a:lstStyle/>
+          <a:p>
+            <a:r>
+              <a:rPr lang="it-IT" sz="1500" b="1" dirty="0">
+                <a:solidFill>
+                  <a:srgbClr val="002060"/>
+                </a:solidFill>
+              </a:rPr>
+              <a:t>Anna Sofia Moro</a:t>
+            </a:r>
+          </a:p>
+        </p:txBody>
+      </p:sp>
+      <p:sp>
+        <p:nvSpPr>
+          <p:cNvPr id="6" name="Segnaposto numero diapositiva 5">
+            <a:extLst>
+              <a:ext uri="{FF2B5EF4-FFF2-40B4-BE49-F238E27FC236}">
+                <a16:creationId xmlns:a16="http://schemas.microsoft.com/office/drawing/2014/main" id="{EB429AC5-2B17-3AA7-829E-3FADDA4D07B5}"/>
+              </a:ext>
+            </a:extLst>
+          </p:cNvPr>
+          <p:cNvSpPr>
+            <a:spLocks noGrp="1"/>
+          </p:cNvSpPr>
+          <p:nvPr>
+            <p:ph type="sldNum" sz="quarter" idx="12"/>
+          </p:nvPr>
+        </p:nvSpPr>
+        <p:spPr>
+          <a:xfrm>
+            <a:off x="8610600" y="6356349"/>
+            <a:ext cx="2743200" cy="432000"/>
+          </a:xfrm>
+        </p:spPr>
+        <p:txBody>
+          <a:bodyPr/>
+          <a:lstStyle/>
+          <a:p>
+            <a:fld id="{0A318BD9-CA14-4A83-ACF0-03D5918EB402}" type="slidenum">
+              <a:rPr lang="it-IT" sz="1500" b="1" smtClean="0">
+                <a:solidFill>
+                  <a:srgbClr val="002060"/>
+                </a:solidFill>
+              </a:rPr>
+              <a:t>2</a:t>
+            </a:fld>
+            <a:endParaRPr lang="it-IT" sz="1500" b="1" dirty="0">
+              <a:solidFill>
+                <a:srgbClr val="002060"/>
+              </a:solidFill>
+            </a:endParaRPr>
+          </a:p>
+        </p:txBody>
+      </p:sp>
+      <p:cxnSp>
+        <p:nvCxnSpPr>
+          <p:cNvPr id="10" name="Connettore diritto 9">
+            <a:extLst>
+              <a:ext uri="{FF2B5EF4-FFF2-40B4-BE49-F238E27FC236}">
+                <a16:creationId xmlns:a16="http://schemas.microsoft.com/office/drawing/2014/main" id="{D66CB6E1-F902-FACB-CE04-F0353E6FCF48}"/>
+              </a:ext>
+            </a:extLst>
+          </p:cNvPr>
+          <p:cNvCxnSpPr>
+            <a:cxnSpLocks/>
+          </p:cNvCxnSpPr>
+          <p:nvPr/>
+        </p:nvCxnSpPr>
+        <p:spPr>
+          <a:xfrm>
+            <a:off x="696000" y="1155368"/>
+            <a:ext cx="10800000" cy="0"/>
+          </a:xfrm>
+          <a:prstGeom prst="line">
+            <a:avLst/>
+          </a:prstGeom>
+          <a:ln w="38100">
+            <a:solidFill>
+              <a:srgbClr val="002060"/>
+            </a:solidFill>
+          </a:ln>
+        </p:spPr>
+        <p:style>
+          <a:lnRef idx="2">
+            <a:schemeClr val="accent1"/>
+          </a:lnRef>
+          <a:fillRef idx="0">
+            <a:schemeClr val="accent1"/>
+          </a:fillRef>
+          <a:effectRef idx="1">
+            <a:schemeClr val="accent1"/>
+          </a:effectRef>
+          <a:fontRef idx="minor">
+            <a:schemeClr val="tx1"/>
+          </a:fontRef>
+        </p:style>
+      </p:cxnSp>
+      <p:pic>
+        <p:nvPicPr>
+          <p:cNvPr id="7" name="Picture 6">
+            <a:extLst>
+              <a:ext uri="{FF2B5EF4-FFF2-40B4-BE49-F238E27FC236}">
+                <a16:creationId xmlns:a16="http://schemas.microsoft.com/office/drawing/2014/main" id="{385C7844-3A83-E9D6-B2E3-5D39E8C2393A}"/>
+              </a:ext>
+            </a:extLst>
+          </p:cNvPr>
+          <p:cNvPicPr>
+            <a:picLocks noChangeAspect="1"/>
+          </p:cNvPicPr>
+          <p:nvPr/>
+        </p:nvPicPr>
+        <p:blipFill>
+          <a:blip r:embed="rId3"/>
+          <a:stretch>
+            <a:fillRect/>
+          </a:stretch>
+        </p:blipFill>
+        <p:spPr>
+          <a:xfrm>
+            <a:off x="12255109" y="800099"/>
+            <a:ext cx="1754886" cy="1457835"/>
+          </a:xfrm>
+          <a:prstGeom prst="rect">
+            <a:avLst/>
+          </a:prstGeom>
+        </p:spPr>
+      </p:pic>
+      <p:sp>
+        <p:nvSpPr>
+          <p:cNvPr id="8" name="Titolo 1">
+            <a:extLst>
+              <a:ext uri="{FF2B5EF4-FFF2-40B4-BE49-F238E27FC236}">
+                <a16:creationId xmlns:a16="http://schemas.microsoft.com/office/drawing/2014/main" id="{97BDB4DF-62BD-8D3D-089D-863830B874D4}"/>
+              </a:ext>
+            </a:extLst>
+          </p:cNvPr>
+          <p:cNvSpPr txBox="1">
+            <a:spLocks/>
+          </p:cNvSpPr>
+          <p:nvPr/>
+        </p:nvSpPr>
+        <p:spPr>
+          <a:xfrm>
+            <a:off x="696000" y="688243"/>
+            <a:ext cx="10800000" cy="559599"/>
+          </a:xfrm>
+          <a:prstGeom prst="roundRect">
+            <a:avLst>
+              <a:gd name="adj" fmla="val 0"/>
+            </a:avLst>
+          </a:prstGeom>
+          <a:noFill/>
+        </p:spPr>
+        <p:txBody>
+          <a:bodyPr vert="horz" lIns="91440" tIns="45720" rIns="91440" bIns="45720" rtlCol="0" anchor="ctr">
+            <a:normAutofit/>
+          </a:bodyPr>
+          <a:lstStyle>
+            <a:lvl1pPr algn="l" defTabSz="914400" rtl="0" eaLnBrk="1" latinLnBrk="0" hangingPunct="1">
+              <a:lnSpc>
+                <a:spcPct val="90000"/>
+              </a:lnSpc>
+              <a:spcBef>
+                <a:spcPct val="0"/>
+              </a:spcBef>
+              <a:buNone/>
+              <a:defRPr sz="4400" kern="1200">
+                <a:solidFill>
+                  <a:schemeClr val="tx1"/>
+                </a:solidFill>
+                <a:latin typeface="+mj-lt"/>
+                <a:ea typeface="+mj-ea"/>
+                <a:cs typeface="+mj-cs"/>
+              </a:defRPr>
+            </a:lvl1pPr>
+          </a:lstStyle>
+          <a:p>
+            <a:pPr algn="r"/>
+            <a:r>
+              <a:rPr lang="en-US" sz="2000" b="1" i="1" dirty="0">
+                <a:solidFill>
+                  <a:srgbClr val="002060"/>
+                </a:solidFill>
+                <a:ea typeface="Calibri" panose="020F0502020204030204" pitchFamily="34" charset="0"/>
+                <a:cs typeface="Calibri" panose="020F0502020204030204" pitchFamily="34" charset="0"/>
+              </a:rPr>
+              <a:t>THE PHYSICS</a:t>
+            </a:r>
+            <a:endParaRPr lang="it-IT" sz="2000" b="1" i="1" dirty="0">
+              <a:solidFill>
+                <a:srgbClr val="002060"/>
+              </a:solidFill>
+              <a:ea typeface="Calibri" panose="020F0502020204030204" pitchFamily="34" charset="0"/>
+              <a:cs typeface="Calibri" panose="020F0502020204030204" pitchFamily="34" charset="0"/>
+            </a:endParaRPr>
+          </a:p>
+        </p:txBody>
+      </p:sp>
+      <p:pic>
+        <p:nvPicPr>
+          <p:cNvPr id="9" name="Picture 8" descr="Guided paths Positively charged particles (red) can be “channelled” along the trough of the electrostatic potential (shaded surface) between planes of nuclei in a bent crystal, achieving a far stronger curvature than conventional magnets. In this artist’s impression, length scales have been adjusted for clarity. Credit: D De Biasio">
+            <a:extLst>
+              <a:ext uri="{FF2B5EF4-FFF2-40B4-BE49-F238E27FC236}">
+                <a16:creationId xmlns:a16="http://schemas.microsoft.com/office/drawing/2014/main" id="{F29C6376-7C95-BE0C-2963-D90E86B4C3E0}"/>
+              </a:ext>
+            </a:extLst>
+          </p:cNvPr>
+          <p:cNvPicPr>
+            <a:picLocks noChangeAspect="1"/>
+          </p:cNvPicPr>
+          <p:nvPr/>
+        </p:nvPicPr>
+        <p:blipFill>
+          <a:blip r:embed="rId4"/>
+          <a:srcRect/>
+          <a:stretch>
+            <a:fillRect/>
+          </a:stretch>
+        </p:blipFill>
+        <p:spPr>
+          <a:xfrm>
+            <a:off x="7298267" y="1426676"/>
+            <a:ext cx="4459413" cy="2508420"/>
+          </a:xfrm>
+          <a:prstGeom prst="rect">
+            <a:avLst/>
+          </a:prstGeom>
+        </p:spPr>
+      </p:pic>
+      <p:pic>
+        <p:nvPicPr>
+          <p:cNvPr id="11" name="Picture 10">
+            <a:extLst>
+              <a:ext uri="{FF2B5EF4-FFF2-40B4-BE49-F238E27FC236}">
+                <a16:creationId xmlns:a16="http://schemas.microsoft.com/office/drawing/2014/main" id="{E56A185A-63A5-0021-964C-80C5F71E48B2}"/>
+              </a:ext>
+            </a:extLst>
+          </p:cNvPr>
+          <p:cNvPicPr>
+            <a:picLocks noChangeAspect="1"/>
+          </p:cNvPicPr>
+          <p:nvPr/>
+        </p:nvPicPr>
+        <p:blipFill>
+          <a:blip r:embed="rId5"/>
+          <a:stretch>
+            <a:fillRect/>
+          </a:stretch>
+        </p:blipFill>
+        <p:spPr>
+          <a:xfrm>
+            <a:off x="7759700" y="4121689"/>
+            <a:ext cx="3594100" cy="2349988"/>
+          </a:xfrm>
+          <a:prstGeom prst="rect">
+            <a:avLst/>
+          </a:prstGeom>
+        </p:spPr>
+      </p:pic>
+      <p:pic>
+        <p:nvPicPr>
+          <p:cNvPr id="13" name="Picture 12">
+            <a:extLst>
+              <a:ext uri="{FF2B5EF4-FFF2-40B4-BE49-F238E27FC236}">
+                <a16:creationId xmlns:a16="http://schemas.microsoft.com/office/drawing/2014/main" id="{8464855D-92B8-F10E-6EA8-616112F40FA7}"/>
+              </a:ext>
+            </a:extLst>
+          </p:cNvPr>
+          <p:cNvPicPr>
+            <a:picLocks noChangeAspect="1"/>
+          </p:cNvPicPr>
+          <p:nvPr/>
+        </p:nvPicPr>
+        <p:blipFill>
+          <a:blip r:embed="rId6"/>
+          <a:srcRect l="6799" b="33785"/>
+          <a:stretch>
+            <a:fillRect/>
+          </a:stretch>
+        </p:blipFill>
+        <p:spPr>
+          <a:xfrm>
+            <a:off x="-4887334" y="153700"/>
+            <a:ext cx="4596484" cy="2188284"/>
+          </a:xfrm>
+          <a:prstGeom prst="rect">
+            <a:avLst/>
+          </a:prstGeom>
+        </p:spPr>
+      </p:pic>
+      <mc:AlternateContent xmlns:mc="http://schemas.openxmlformats.org/markup-compatibility/2006" xmlns:a14="http://schemas.microsoft.com/office/drawing/2010/main">
+        <mc:Choice Requires="a14">
+          <p:sp>
+            <p:nvSpPr>
+              <p:cNvPr id="14" name="Rectangle: Rounded Corners 13">
+                <a:extLst>
+                  <a:ext uri="{FF2B5EF4-FFF2-40B4-BE49-F238E27FC236}">
+                    <a16:creationId xmlns:a16="http://schemas.microsoft.com/office/drawing/2014/main" id="{98F58A1D-BBB1-3327-58AE-595497BB6ABB}"/>
+                  </a:ext>
+                </a:extLst>
+              </p:cNvPr>
+              <p:cNvSpPr/>
+              <p:nvPr/>
+            </p:nvSpPr>
+            <p:spPr>
+              <a:xfrm>
+                <a:off x="838200" y="4966636"/>
+                <a:ext cx="6121399" cy="1203121"/>
+              </a:xfrm>
+              <a:prstGeom prst="roundRect">
+                <a:avLst>
+                  <a:gd name="adj" fmla="val 37357"/>
+                </a:avLst>
+              </a:prstGeom>
+              <a:solidFill>
+                <a:schemeClr val="bg2"/>
+              </a:solidFill>
+              <a:ln w="38100">
+                <a:solidFill>
+                  <a:srgbClr val="002060"/>
+                </a:solidFill>
+              </a:ln>
+            </p:spPr>
+            <p:style>
+              <a:lnRef idx="2">
+                <a:schemeClr val="accent1">
+                  <a:shade val="15000"/>
+                </a:schemeClr>
+              </a:lnRef>
+              <a:fillRef idx="1">
+                <a:schemeClr val="accent1"/>
+              </a:fillRef>
+              <a:effectRef idx="0">
+                <a:schemeClr val="accent1"/>
+              </a:effectRef>
+              <a:fontRef idx="minor">
+                <a:schemeClr val="lt1"/>
+              </a:fontRef>
+            </p:style>
+            <p:txBody>
+              <a:bodyPr rtlCol="0" anchor="ctr"/>
+              <a:lstStyle/>
+              <a:p>
+                <a:pPr algn="ctr"/>
+                <a:r>
+                  <a:rPr lang="en-US" dirty="0">
+                    <a:solidFill>
+                      <a:srgbClr val="002060"/>
+                    </a:solidFill>
+                  </a:rPr>
+                  <a:t>Entry condition: the Lindhard angle </a:t>
+                </a:r>
+                <a14:m>
+                  <m:oMath xmlns:m="http://schemas.openxmlformats.org/officeDocument/2006/math">
+                    <m:sSub>
+                      <m:sSubPr>
+                        <m:ctrlPr>
+                          <a:rPr lang="en-US" b="0" i="1" smtClean="0">
+                            <a:solidFill>
+                              <a:srgbClr val="002060"/>
+                            </a:solidFill>
+                            <a:latin typeface="Cambria Math" panose="02040503050406030204" pitchFamily="18" charset="0"/>
+                          </a:rPr>
+                        </m:ctrlPr>
+                      </m:sSubPr>
+                      <m:e>
+                        <m:r>
+                          <a:rPr lang="en-US" b="0" i="1" smtClean="0">
+                            <a:solidFill>
+                              <a:srgbClr val="002060"/>
+                            </a:solidFill>
+                            <a:latin typeface="Cambria Math" panose="02040503050406030204" pitchFamily="18" charset="0"/>
+                          </a:rPr>
+                          <m:t>𝜃</m:t>
+                        </m:r>
+                      </m:e>
+                      <m:sub>
+                        <m:r>
+                          <a:rPr lang="en-US" b="0" i="1" smtClean="0">
+                            <a:solidFill>
+                              <a:srgbClr val="002060"/>
+                            </a:solidFill>
+                            <a:latin typeface="Cambria Math" panose="02040503050406030204" pitchFamily="18" charset="0"/>
+                          </a:rPr>
+                          <m:t>𝐿</m:t>
+                        </m:r>
+                      </m:sub>
+                    </m:sSub>
+                  </m:oMath>
+                </a14:m>
+                <a:endParaRPr lang="it-IT" dirty="0">
+                  <a:solidFill>
+                    <a:srgbClr val="002060"/>
+                  </a:solidFill>
+                </a:endParaRPr>
+              </a:p>
+              <a:p>
+                <a:pPr algn="ctr"/>
+                <a:r>
+                  <a:rPr lang="it-IT" dirty="0">
+                    <a:solidFill>
+                      <a:schemeClr val="tx1"/>
+                    </a:solidFill>
+                  </a:rPr>
+                  <a:t>incident angle  </a:t>
+                </a:r>
+                <a14:m>
+                  <m:oMath xmlns:m="http://schemas.openxmlformats.org/officeDocument/2006/math">
+                    <m:r>
+                      <a:rPr lang="it-IT">
+                        <a:solidFill>
+                          <a:schemeClr val="tx1"/>
+                        </a:solidFill>
+                        <a:latin typeface="Cambria Math" panose="02040503050406030204" pitchFamily="18" charset="0"/>
+                      </a:rPr>
+                      <m:t>&lt;</m:t>
+                    </m:r>
+                    <m:r>
+                      <a:rPr lang="en-US" b="0" i="1" smtClean="0">
+                        <a:solidFill>
+                          <a:schemeClr val="tx1"/>
+                        </a:solidFill>
+                        <a:latin typeface="Cambria Math" panose="02040503050406030204" pitchFamily="18" charset="0"/>
+                      </a:rPr>
+                      <m:t>±1/2</m:t>
+                    </m:r>
+                    <m:sSub>
+                      <m:sSubPr>
+                        <m:ctrlPr>
+                          <a:rPr lang="en-US" b="0" i="1" smtClean="0">
+                            <a:solidFill>
+                              <a:schemeClr val="tx1"/>
+                            </a:solidFill>
+                            <a:latin typeface="Cambria Math" panose="02040503050406030204" pitchFamily="18" charset="0"/>
+                          </a:rPr>
+                        </m:ctrlPr>
+                      </m:sSubPr>
+                      <m:e>
+                        <m:r>
+                          <a:rPr lang="en-US" b="0" i="1" smtClean="0">
+                            <a:solidFill>
+                              <a:schemeClr val="tx1"/>
+                            </a:solidFill>
+                            <a:latin typeface="Cambria Math" panose="02040503050406030204" pitchFamily="18" charset="0"/>
+                          </a:rPr>
+                          <m:t> </m:t>
+                        </m:r>
+                        <m:r>
+                          <a:rPr lang="en-US" b="0" i="1" smtClean="0">
+                            <a:solidFill>
+                              <a:schemeClr val="tx1"/>
+                            </a:solidFill>
+                            <a:latin typeface="Cambria Math" panose="02040503050406030204" pitchFamily="18" charset="0"/>
+                          </a:rPr>
+                          <m:t>𝜃</m:t>
+                        </m:r>
+                      </m:e>
+                      <m:sub>
+                        <m:r>
+                          <a:rPr lang="en-US" b="0" i="1" smtClean="0">
+                            <a:solidFill>
+                              <a:schemeClr val="tx1"/>
+                            </a:solidFill>
+                            <a:latin typeface="Cambria Math" panose="02040503050406030204" pitchFamily="18" charset="0"/>
+                          </a:rPr>
+                          <m:t>𝐿</m:t>
+                        </m:r>
+                      </m:sub>
+                    </m:sSub>
+                  </m:oMath>
+                </a14:m>
+                <a:endParaRPr lang="en-US" b="0" dirty="0">
+                  <a:solidFill>
+                    <a:schemeClr val="tx1"/>
+                  </a:solidFill>
+                </a:endParaRPr>
+              </a:p>
+              <a:p>
+                <a:pPr algn="ctr"/>
+                <a14:m>
+                  <m:oMathPara xmlns:m="http://schemas.openxmlformats.org/officeDocument/2006/math">
+                    <m:oMath>
+                      <m:r>
+                        <a:rPr lang="en-US" b="0" i="1" dirty="0" smtClean="0">
+                          <a:solidFill>
+                            <a:schemeClr val="tx1"/>
+                          </a:solidFill>
+                          <a:latin typeface="Cambria Math" panose="02040503050406030204" pitchFamily="18" charset="0"/>
+                          <a:ea typeface="Cambria Math" panose="02040503050406030204" pitchFamily="18" charset="0"/>
+                        </a:rPr>
+                        <m:t>≈</m:t>
+                      </m:r>
+                      <m:r>
+                        <a:rPr lang="en-US" b="0" i="1" dirty="0" smtClean="0">
+                          <a:solidFill>
+                            <a:schemeClr val="tx1"/>
+                          </a:solidFill>
+                          <a:latin typeface="Cambria Math" panose="02040503050406030204" pitchFamily="18" charset="0"/>
+                        </a:rPr>
+                        <m:t>13 </m:t>
+                      </m:r>
+                      <m:r>
+                        <a:rPr lang="en-US" b="0" i="1" dirty="0" smtClean="0">
+                          <a:solidFill>
+                            <a:schemeClr val="tx1"/>
+                          </a:solidFill>
+                          <a:latin typeface="Cambria Math" panose="02040503050406030204" pitchFamily="18" charset="0"/>
+                        </a:rPr>
+                        <m:t>𝜇</m:t>
+                      </m:r>
+                      <m:r>
+                        <m:rPr>
+                          <m:sty m:val="p"/>
+                        </m:rPr>
+                        <a:rPr lang="en-US" b="0" i="0" dirty="0" smtClean="0">
+                          <a:solidFill>
+                            <a:schemeClr val="tx1"/>
+                          </a:solidFill>
+                          <a:latin typeface="Cambria Math" panose="02040503050406030204" pitchFamily="18" charset="0"/>
+                        </a:rPr>
+                        <m:t>rad</m:t>
+                      </m:r>
+                      <m:r>
+                        <a:rPr lang="en-US" b="0" i="1" dirty="0" smtClean="0">
+                          <a:solidFill>
+                            <a:schemeClr val="tx1"/>
+                          </a:solidFill>
+                          <a:latin typeface="Cambria Math" panose="02040503050406030204" pitchFamily="18" charset="0"/>
+                        </a:rPr>
+                        <m:t> @ 180 </m:t>
+                      </m:r>
+                      <m:r>
+                        <m:rPr>
+                          <m:sty m:val="p"/>
+                        </m:rPr>
+                        <a:rPr lang="en-US" b="0" i="0" dirty="0" smtClean="0">
+                          <a:solidFill>
+                            <a:schemeClr val="tx1"/>
+                          </a:solidFill>
+                          <a:latin typeface="Cambria Math" panose="02040503050406030204" pitchFamily="18" charset="0"/>
+                        </a:rPr>
+                        <m:t>GeV</m:t>
+                      </m:r>
+                    </m:oMath>
+                  </m:oMathPara>
+                </a14:m>
+                <a:endParaRPr lang="en-US" b="0" dirty="0">
+                  <a:solidFill>
+                    <a:schemeClr val="tx1"/>
+                  </a:solidFill>
+                </a:endParaRPr>
+              </a:p>
+            </p:txBody>
+          </p:sp>
+        </mc:Choice>
+        <mc:Fallback xmlns="">
+          <p:sp>
+            <p:nvSpPr>
+              <p:cNvPr id="14" name="Rectangle: Rounded Corners 13">
+                <a:extLst>
+                  <a:ext uri="{FF2B5EF4-FFF2-40B4-BE49-F238E27FC236}">
+                    <a16:creationId xmlns:a16="http://schemas.microsoft.com/office/drawing/2014/main" id="{98F58A1D-BBB1-3327-58AE-595497BB6ABB}"/>
+                  </a:ext>
+                </a:extLst>
+              </p:cNvPr>
+              <p:cNvSpPr>
+                <a:spLocks noRot="1" noChangeAspect="1" noMove="1" noResize="1" noEditPoints="1" noAdjustHandles="1" noChangeArrowheads="1" noChangeShapeType="1" noTextEdit="1"/>
+              </p:cNvSpPr>
+              <p:nvPr/>
+            </p:nvSpPr>
+            <p:spPr>
+              <a:xfrm>
+                <a:off x="838200" y="4966636"/>
+                <a:ext cx="6121399" cy="1203121"/>
+              </a:xfrm>
+              <a:prstGeom prst="roundRect">
+                <a:avLst>
+                  <a:gd name="adj" fmla="val 37357"/>
+                </a:avLst>
+              </a:prstGeom>
+              <a:blipFill>
+                <a:blip r:embed="rId7"/>
+                <a:stretch>
+                  <a:fillRect/>
+                </a:stretch>
+              </a:blipFill>
+              <a:ln w="38100">
+                <a:solidFill>
+                  <a:srgbClr val="002060"/>
+                </a:solidFill>
+              </a:ln>
+            </p:spPr>
+            <p:txBody>
+              <a:bodyPr/>
+              <a:lstStyle/>
+              <a:p>
+                <a:r>
+                  <a:rPr lang="it-IT">
+                    <a:noFill/>
+                  </a:rPr>
+                  <a:t> </a:t>
+                </a:r>
+              </a:p>
+            </p:txBody>
+          </p:sp>
+        </mc:Fallback>
+      </mc:AlternateContent>
+      <p:pic>
+        <p:nvPicPr>
+          <p:cNvPr id="16" name="Picture 15">
+            <a:extLst>
+              <a:ext uri="{FF2B5EF4-FFF2-40B4-BE49-F238E27FC236}">
+                <a16:creationId xmlns:a16="http://schemas.microsoft.com/office/drawing/2014/main" id="{82ED3292-D68F-B234-8F5B-AD34F859AF14}"/>
+              </a:ext>
+            </a:extLst>
+          </p:cNvPr>
+          <p:cNvPicPr>
+            <a:picLocks noChangeAspect="1"/>
+          </p:cNvPicPr>
+          <p:nvPr/>
+        </p:nvPicPr>
+        <p:blipFill>
+          <a:blip r:embed="rId8"/>
+          <a:stretch>
+            <a:fillRect/>
+          </a:stretch>
+        </p:blipFill>
+        <p:spPr>
+          <a:xfrm>
+            <a:off x="12546988" y="3995696"/>
+            <a:ext cx="2422692" cy="1572500"/>
+          </a:xfrm>
+          <a:prstGeom prst="rect">
+            <a:avLst/>
+          </a:prstGeom>
+        </p:spPr>
+      </p:pic>
+    </p:spTree>
+    <p:extLst>
+      <p:ext uri="{BB962C8B-B14F-4D97-AF65-F5344CB8AC3E}">
+        <p14:creationId xmlns:p14="http://schemas.microsoft.com/office/powerpoint/2010/main" val="3483749309"/>
+      </p:ext>
+    </p:extLst>
+  </p:cSld>
+  <p:clrMapOvr>
+    <a:masterClrMapping/>
+  </p:clrMapOvr>
+</p:sld>
+</file>
+
+<file path=ppt/slides/slide20.xml><?xml version="1.0" encoding="utf-8"?>
 <p:sld xmlns:a="http://schemas.openxmlformats.org/drawingml/2006/main" xmlns:r="http://schemas.openxmlformats.org/officeDocument/2006/relationships" xmlns:p="http://schemas.openxmlformats.org/presentationml/2006/main">
   <p:cSld>
     <p:spTree>
@@ -20057,7 +21152,7 @@
                   <a:srgbClr val="002060"/>
                 </a:solidFill>
               </a:rPr>
-              <a:t>19</a:t>
+              <a:t>20</a:t>
             </a:fld>
             <a:endParaRPr lang="it-IT" sz="1500" b="1" dirty="0">
               <a:solidFill>
@@ -20369,860 +21464,7 @@
 </p:sld>
 </file>
 
-<file path=ppt/slides/slide2.xml><?xml version="1.0" encoding="utf-8"?>
-<p:sld xmlns:a="http://schemas.openxmlformats.org/drawingml/2006/main" xmlns:r="http://schemas.openxmlformats.org/officeDocument/2006/relationships" xmlns:p="http://schemas.openxmlformats.org/presentationml/2006/main">
-  <p:cSld>
-    <p:spTree>
-      <p:nvGrpSpPr>
-        <p:cNvPr id="1" name=""/>
-        <p:cNvGrpSpPr/>
-        <p:nvPr/>
-      </p:nvGrpSpPr>
-      <p:grpSpPr>
-        <a:xfrm>
-          <a:off x="0" y="0"/>
-          <a:ext cx="0" cy="0"/>
-          <a:chOff x="0" y="0"/>
-          <a:chExt cx="0" cy="0"/>
-        </a:xfrm>
-      </p:grpSpPr>
-      <p:sp>
-        <p:nvSpPr>
-          <p:cNvPr id="2" name="Titolo 1">
-            <a:extLst>
-              <a:ext uri="{FF2B5EF4-FFF2-40B4-BE49-F238E27FC236}">
-                <a16:creationId xmlns:a16="http://schemas.microsoft.com/office/drawing/2014/main" id="{C2EC8513-F988-C98D-D333-B6789C129AFF}"/>
-              </a:ext>
-            </a:extLst>
-          </p:cNvPr>
-          <p:cNvSpPr>
-            <a:spLocks noGrp="1"/>
-          </p:cNvSpPr>
-          <p:nvPr>
-            <p:ph type="title"/>
-          </p:nvPr>
-        </p:nvSpPr>
-        <p:spPr>
-          <a:xfrm>
-            <a:off x="38100" y="69651"/>
-            <a:ext cx="12114000" cy="1153094"/>
-          </a:xfrm>
-          <a:prstGeom prst="roundRect">
-            <a:avLst>
-              <a:gd name="adj" fmla="val 36459"/>
-            </a:avLst>
-          </a:prstGeom>
-          <a:noFill/>
-        </p:spPr>
-        <p:txBody>
-          <a:bodyPr>
-            <a:normAutofit/>
-          </a:bodyPr>
-          <a:lstStyle/>
-          <a:p>
-            <a:r>
-              <a:rPr lang="en-US" sz="4000" b="1" dirty="0">
-                <a:solidFill>
-                  <a:srgbClr val="002060"/>
-                </a:solidFill>
-              </a:rPr>
-              <a:t>	WHAT IS ‘CHANNELING’ IN CRYSTALS?</a:t>
-            </a:r>
-            <a:endParaRPr lang="it-IT" sz="4000" b="1" dirty="0">
-              <a:solidFill>
-                <a:srgbClr val="002060"/>
-              </a:solidFill>
-            </a:endParaRPr>
-          </a:p>
-        </p:txBody>
-      </p:sp>
-      <p:sp>
-        <p:nvSpPr>
-          <p:cNvPr id="3" name="Segnaposto contenuto 2">
-            <a:extLst>
-              <a:ext uri="{FF2B5EF4-FFF2-40B4-BE49-F238E27FC236}">
-                <a16:creationId xmlns:a16="http://schemas.microsoft.com/office/drawing/2014/main" id="{D705E017-952C-14B0-9906-4510932BCA3F}"/>
-              </a:ext>
-            </a:extLst>
-          </p:cNvPr>
-          <p:cNvSpPr>
-            <a:spLocks noGrp="1"/>
-          </p:cNvSpPr>
-          <p:nvPr>
-            <p:ph idx="1"/>
-          </p:nvPr>
-        </p:nvSpPr>
-        <p:spPr>
-          <a:xfrm>
-            <a:off x="838200" y="1401288"/>
-            <a:ext cx="6460067" cy="4776227"/>
-          </a:xfrm>
-        </p:spPr>
-        <p:txBody>
-          <a:bodyPr>
-            <a:normAutofit/>
-          </a:bodyPr>
-          <a:lstStyle/>
-          <a:p>
-            <a:r>
-              <a:rPr lang="it-IT" sz="2000" i="1" dirty="0"/>
-              <a:t>Channeling effect</a:t>
-            </a:r>
-          </a:p>
-          <a:p>
-            <a:pPr marL="0" indent="0">
-              <a:buNone/>
-            </a:pPr>
-            <a:r>
-              <a:rPr lang="it-IT" sz="2000" dirty="0"/>
-              <a:t>Charged particles get trapped and guided between regular atomic planes</a:t>
-            </a:r>
-          </a:p>
-          <a:p>
-            <a:r>
-              <a:rPr lang="it-IT" sz="2000" i="1" dirty="0"/>
-              <a:t>Beam deflection</a:t>
-            </a:r>
-          </a:p>
-          <a:p>
-            <a:pPr marL="0" indent="0">
-              <a:buNone/>
-            </a:pPr>
-            <a:r>
-              <a:rPr lang="it-IT" sz="2000" dirty="0"/>
-              <a:t>Bending the crystal physically steers the beam’s trajectory</a:t>
-            </a:r>
-          </a:p>
-          <a:p>
-            <a:r>
-              <a:rPr lang="it-IT" sz="2000" i="1" dirty="0"/>
-              <a:t>Advantage</a:t>
-            </a:r>
-          </a:p>
-          <a:p>
-            <a:pPr marL="0" indent="0">
-              <a:buNone/>
-            </a:pPr>
-            <a:r>
-              <a:rPr lang="it-IT" sz="2000" dirty="0"/>
-              <a:t>A compact alternative to traditional magnets for deflecting or extracting beams</a:t>
-            </a:r>
-          </a:p>
-        </p:txBody>
-      </p:sp>
-      <p:sp>
-        <p:nvSpPr>
-          <p:cNvPr id="4" name="Segnaposto data 3">
-            <a:extLst>
-              <a:ext uri="{FF2B5EF4-FFF2-40B4-BE49-F238E27FC236}">
-                <a16:creationId xmlns:a16="http://schemas.microsoft.com/office/drawing/2014/main" id="{A9CBEBE7-5AD1-2A5D-D796-FC860CFACB62}"/>
-              </a:ext>
-            </a:extLst>
-          </p:cNvPr>
-          <p:cNvSpPr>
-            <a:spLocks noGrp="1"/>
-          </p:cNvSpPr>
-          <p:nvPr>
-            <p:ph type="dt" sz="half" idx="10"/>
-          </p:nvPr>
-        </p:nvSpPr>
-        <p:spPr>
-          <a:xfrm>
-            <a:off x="838200" y="6356349"/>
-            <a:ext cx="2743200" cy="432000"/>
-          </a:xfrm>
-        </p:spPr>
-        <p:txBody>
-          <a:bodyPr/>
-          <a:lstStyle/>
-          <a:p>
-            <a:r>
-              <a:rPr lang="it-IT" sz="1500" b="1" dirty="0">
-                <a:solidFill>
-                  <a:srgbClr val="002060"/>
-                </a:solidFill>
-              </a:rPr>
-              <a:t>26.08.2026</a:t>
-            </a:r>
-          </a:p>
-        </p:txBody>
-      </p:sp>
-      <p:sp>
-        <p:nvSpPr>
-          <p:cNvPr id="5" name="Segnaposto piè di pagina 4">
-            <a:extLst>
-              <a:ext uri="{FF2B5EF4-FFF2-40B4-BE49-F238E27FC236}">
-                <a16:creationId xmlns:a16="http://schemas.microsoft.com/office/drawing/2014/main" id="{D65DDE3E-B94E-09A0-E6FC-740927746D9E}"/>
-              </a:ext>
-            </a:extLst>
-          </p:cNvPr>
-          <p:cNvSpPr>
-            <a:spLocks noGrp="1"/>
-          </p:cNvSpPr>
-          <p:nvPr>
-            <p:ph type="ftr" sz="quarter" idx="11"/>
-          </p:nvPr>
-        </p:nvSpPr>
-        <p:spPr>
-          <a:xfrm>
-            <a:off x="0" y="6356349"/>
-            <a:ext cx="12192000" cy="432000"/>
-          </a:xfrm>
-        </p:spPr>
-        <p:txBody>
-          <a:bodyPr/>
-          <a:lstStyle/>
-          <a:p>
-            <a:r>
-              <a:rPr lang="it-IT" sz="1500" b="1" dirty="0">
-                <a:solidFill>
-                  <a:srgbClr val="002060"/>
-                </a:solidFill>
-              </a:rPr>
-              <a:t>Anna Sofia Moro</a:t>
-            </a:r>
-          </a:p>
-        </p:txBody>
-      </p:sp>
-      <p:sp>
-        <p:nvSpPr>
-          <p:cNvPr id="6" name="Segnaposto numero diapositiva 5">
-            <a:extLst>
-              <a:ext uri="{FF2B5EF4-FFF2-40B4-BE49-F238E27FC236}">
-                <a16:creationId xmlns:a16="http://schemas.microsoft.com/office/drawing/2014/main" id="{EB429AC5-2B17-3AA7-829E-3FADDA4D07B5}"/>
-              </a:ext>
-            </a:extLst>
-          </p:cNvPr>
-          <p:cNvSpPr>
-            <a:spLocks noGrp="1"/>
-          </p:cNvSpPr>
-          <p:nvPr>
-            <p:ph type="sldNum" sz="quarter" idx="12"/>
-          </p:nvPr>
-        </p:nvSpPr>
-        <p:spPr>
-          <a:xfrm>
-            <a:off x="8610600" y="6356349"/>
-            <a:ext cx="2743200" cy="432000"/>
-          </a:xfrm>
-        </p:spPr>
-        <p:txBody>
-          <a:bodyPr/>
-          <a:lstStyle/>
-          <a:p>
-            <a:fld id="{0A318BD9-CA14-4A83-ACF0-03D5918EB402}" type="slidenum">
-              <a:rPr lang="it-IT" sz="1500" b="1" smtClean="0">
-                <a:solidFill>
-                  <a:srgbClr val="002060"/>
-                </a:solidFill>
-              </a:rPr>
-              <a:t>2</a:t>
-            </a:fld>
-            <a:endParaRPr lang="it-IT" sz="1500" b="1" dirty="0">
-              <a:solidFill>
-                <a:srgbClr val="002060"/>
-              </a:solidFill>
-            </a:endParaRPr>
-          </a:p>
-        </p:txBody>
-      </p:sp>
-      <p:cxnSp>
-        <p:nvCxnSpPr>
-          <p:cNvPr id="10" name="Connettore diritto 9">
-            <a:extLst>
-              <a:ext uri="{FF2B5EF4-FFF2-40B4-BE49-F238E27FC236}">
-                <a16:creationId xmlns:a16="http://schemas.microsoft.com/office/drawing/2014/main" id="{D66CB6E1-F902-FACB-CE04-F0353E6FCF48}"/>
-              </a:ext>
-            </a:extLst>
-          </p:cNvPr>
-          <p:cNvCxnSpPr>
-            <a:cxnSpLocks/>
-          </p:cNvCxnSpPr>
-          <p:nvPr/>
-        </p:nvCxnSpPr>
-        <p:spPr>
-          <a:xfrm>
-            <a:off x="696000" y="1155368"/>
-            <a:ext cx="10800000" cy="0"/>
-          </a:xfrm>
-          <a:prstGeom prst="line">
-            <a:avLst/>
-          </a:prstGeom>
-          <a:ln w="38100">
-            <a:solidFill>
-              <a:srgbClr val="002060"/>
-            </a:solidFill>
-          </a:ln>
-        </p:spPr>
-        <p:style>
-          <a:lnRef idx="2">
-            <a:schemeClr val="accent1"/>
-          </a:lnRef>
-          <a:fillRef idx="0">
-            <a:schemeClr val="accent1"/>
-          </a:fillRef>
-          <a:effectRef idx="1">
-            <a:schemeClr val="accent1"/>
-          </a:effectRef>
-          <a:fontRef idx="minor">
-            <a:schemeClr val="tx1"/>
-          </a:fontRef>
-        </p:style>
-      </p:cxnSp>
-      <p:pic>
-        <p:nvPicPr>
-          <p:cNvPr id="7" name="Picture 6">
-            <a:extLst>
-              <a:ext uri="{FF2B5EF4-FFF2-40B4-BE49-F238E27FC236}">
-                <a16:creationId xmlns:a16="http://schemas.microsoft.com/office/drawing/2014/main" id="{385C7844-3A83-E9D6-B2E3-5D39E8C2393A}"/>
-              </a:ext>
-            </a:extLst>
-          </p:cNvPr>
-          <p:cNvPicPr>
-            <a:picLocks noChangeAspect="1"/>
-          </p:cNvPicPr>
-          <p:nvPr/>
-        </p:nvPicPr>
-        <p:blipFill>
-          <a:blip r:embed="rId3"/>
-          <a:stretch>
-            <a:fillRect/>
-          </a:stretch>
-        </p:blipFill>
-        <p:spPr>
-          <a:xfrm>
-            <a:off x="12255109" y="800099"/>
-            <a:ext cx="1754886" cy="1457835"/>
-          </a:xfrm>
-          <a:prstGeom prst="rect">
-            <a:avLst/>
-          </a:prstGeom>
-        </p:spPr>
-      </p:pic>
-      <p:sp>
-        <p:nvSpPr>
-          <p:cNvPr id="8" name="Titolo 1">
-            <a:extLst>
-              <a:ext uri="{FF2B5EF4-FFF2-40B4-BE49-F238E27FC236}">
-                <a16:creationId xmlns:a16="http://schemas.microsoft.com/office/drawing/2014/main" id="{97BDB4DF-62BD-8D3D-089D-863830B874D4}"/>
-              </a:ext>
-            </a:extLst>
-          </p:cNvPr>
-          <p:cNvSpPr txBox="1">
-            <a:spLocks/>
-          </p:cNvSpPr>
-          <p:nvPr/>
-        </p:nvSpPr>
-        <p:spPr>
-          <a:xfrm>
-            <a:off x="696000" y="688243"/>
-            <a:ext cx="10800000" cy="559599"/>
-          </a:xfrm>
-          <a:prstGeom prst="roundRect">
-            <a:avLst>
-              <a:gd name="adj" fmla="val 0"/>
-            </a:avLst>
-          </a:prstGeom>
-          <a:noFill/>
-        </p:spPr>
-        <p:txBody>
-          <a:bodyPr vert="horz" lIns="91440" tIns="45720" rIns="91440" bIns="45720" rtlCol="0" anchor="ctr">
-            <a:normAutofit/>
-          </a:bodyPr>
-          <a:lstStyle>
-            <a:lvl1pPr algn="l" defTabSz="914400" rtl="0" eaLnBrk="1" latinLnBrk="0" hangingPunct="1">
-              <a:lnSpc>
-                <a:spcPct val="90000"/>
-              </a:lnSpc>
-              <a:spcBef>
-                <a:spcPct val="0"/>
-              </a:spcBef>
-              <a:buNone/>
-              <a:defRPr sz="4400" kern="1200">
-                <a:solidFill>
-                  <a:schemeClr val="tx1"/>
-                </a:solidFill>
-                <a:latin typeface="+mj-lt"/>
-                <a:ea typeface="+mj-ea"/>
-                <a:cs typeface="+mj-cs"/>
-              </a:defRPr>
-            </a:lvl1pPr>
-          </a:lstStyle>
-          <a:p>
-            <a:pPr algn="r"/>
-            <a:r>
-              <a:rPr lang="en-US" sz="2000" b="1" i="1" dirty="0">
-                <a:solidFill>
-                  <a:srgbClr val="002060"/>
-                </a:solidFill>
-                <a:ea typeface="Calibri" panose="020F0502020204030204" pitchFamily="34" charset="0"/>
-                <a:cs typeface="Calibri" panose="020F0502020204030204" pitchFamily="34" charset="0"/>
-              </a:rPr>
-              <a:t>THE PHYSICS</a:t>
-            </a:r>
-            <a:endParaRPr lang="it-IT" sz="2000" b="1" i="1" dirty="0">
-              <a:solidFill>
-                <a:srgbClr val="002060"/>
-              </a:solidFill>
-              <a:ea typeface="Calibri" panose="020F0502020204030204" pitchFamily="34" charset="0"/>
-              <a:cs typeface="Calibri" panose="020F0502020204030204" pitchFamily="34" charset="0"/>
-            </a:endParaRPr>
-          </a:p>
-        </p:txBody>
-      </p:sp>
-      <p:pic>
-        <p:nvPicPr>
-          <p:cNvPr id="9" name="Picture 8" descr="Guided paths Positively charged particles (red) can be “channelled” along the trough of the electrostatic potential (shaded surface) between planes of nuclei in a bent crystal, achieving a far stronger curvature than conventional magnets. In this artist’s impression, length scales have been adjusted for clarity. Credit: D De Biasio">
-            <a:extLst>
-              <a:ext uri="{FF2B5EF4-FFF2-40B4-BE49-F238E27FC236}">
-                <a16:creationId xmlns:a16="http://schemas.microsoft.com/office/drawing/2014/main" id="{F29C6376-7C95-BE0C-2963-D90E86B4C3E0}"/>
-              </a:ext>
-            </a:extLst>
-          </p:cNvPr>
-          <p:cNvPicPr>
-            <a:picLocks noChangeAspect="1"/>
-          </p:cNvPicPr>
-          <p:nvPr/>
-        </p:nvPicPr>
-        <p:blipFill>
-          <a:blip r:embed="rId4"/>
-          <a:srcRect/>
-          <a:stretch>
-            <a:fillRect/>
-          </a:stretch>
-        </p:blipFill>
-        <p:spPr>
-          <a:xfrm>
-            <a:off x="7298267" y="1426676"/>
-            <a:ext cx="4459413" cy="2508420"/>
-          </a:xfrm>
-          <a:prstGeom prst="rect">
-            <a:avLst/>
-          </a:prstGeom>
-        </p:spPr>
-      </p:pic>
-      <p:pic>
-        <p:nvPicPr>
-          <p:cNvPr id="11" name="Picture 10">
-            <a:extLst>
-              <a:ext uri="{FF2B5EF4-FFF2-40B4-BE49-F238E27FC236}">
-                <a16:creationId xmlns:a16="http://schemas.microsoft.com/office/drawing/2014/main" id="{E56A185A-63A5-0021-964C-80C5F71E48B2}"/>
-              </a:ext>
-            </a:extLst>
-          </p:cNvPr>
-          <p:cNvPicPr>
-            <a:picLocks noChangeAspect="1"/>
-          </p:cNvPicPr>
-          <p:nvPr/>
-        </p:nvPicPr>
-        <p:blipFill>
-          <a:blip r:embed="rId5"/>
-          <a:stretch>
-            <a:fillRect/>
-          </a:stretch>
-        </p:blipFill>
-        <p:spPr>
-          <a:xfrm>
-            <a:off x="7759700" y="4121689"/>
-            <a:ext cx="3594100" cy="2349988"/>
-          </a:xfrm>
-          <a:prstGeom prst="rect">
-            <a:avLst/>
-          </a:prstGeom>
-        </p:spPr>
-      </p:pic>
-      <p:pic>
-        <p:nvPicPr>
-          <p:cNvPr id="13" name="Picture 12">
-            <a:extLst>
-              <a:ext uri="{FF2B5EF4-FFF2-40B4-BE49-F238E27FC236}">
-                <a16:creationId xmlns:a16="http://schemas.microsoft.com/office/drawing/2014/main" id="{8464855D-92B8-F10E-6EA8-616112F40FA7}"/>
-              </a:ext>
-            </a:extLst>
-          </p:cNvPr>
-          <p:cNvPicPr>
-            <a:picLocks noChangeAspect="1"/>
-          </p:cNvPicPr>
-          <p:nvPr/>
-        </p:nvPicPr>
-        <p:blipFill>
-          <a:blip r:embed="rId6"/>
-          <a:srcRect l="6799" b="33785"/>
-          <a:stretch>
-            <a:fillRect/>
-          </a:stretch>
-        </p:blipFill>
-        <p:spPr>
-          <a:xfrm>
-            <a:off x="-4887334" y="153700"/>
-            <a:ext cx="4596484" cy="2188284"/>
-          </a:xfrm>
-          <a:prstGeom prst="rect">
-            <a:avLst/>
-          </a:prstGeom>
-        </p:spPr>
-      </p:pic>
-      <mc:AlternateContent xmlns:mc="http://schemas.openxmlformats.org/markup-compatibility/2006" xmlns:a14="http://schemas.microsoft.com/office/drawing/2010/main">
-        <mc:Choice Requires="a14">
-          <p:sp>
-            <p:nvSpPr>
-              <p:cNvPr id="14" name="Rectangle: Rounded Corners 13">
-                <a:extLst>
-                  <a:ext uri="{FF2B5EF4-FFF2-40B4-BE49-F238E27FC236}">
-                    <a16:creationId xmlns:a16="http://schemas.microsoft.com/office/drawing/2014/main" id="{98F58A1D-BBB1-3327-58AE-595497BB6ABB}"/>
-                  </a:ext>
-                </a:extLst>
-              </p:cNvPr>
-              <p:cNvSpPr/>
-              <p:nvPr/>
-            </p:nvSpPr>
-            <p:spPr>
-              <a:xfrm>
-                <a:off x="838200" y="4966636"/>
-                <a:ext cx="6121399" cy="1203121"/>
-              </a:xfrm>
-              <a:prstGeom prst="roundRect">
-                <a:avLst>
-                  <a:gd name="adj" fmla="val 37357"/>
-                </a:avLst>
-              </a:prstGeom>
-              <a:solidFill>
-                <a:schemeClr val="bg2"/>
-              </a:solidFill>
-              <a:ln w="38100">
-                <a:solidFill>
-                  <a:srgbClr val="002060"/>
-                </a:solidFill>
-              </a:ln>
-            </p:spPr>
-            <p:style>
-              <a:lnRef idx="2">
-                <a:schemeClr val="accent1">
-                  <a:shade val="15000"/>
-                </a:schemeClr>
-              </a:lnRef>
-              <a:fillRef idx="1">
-                <a:schemeClr val="accent1"/>
-              </a:fillRef>
-              <a:effectRef idx="0">
-                <a:schemeClr val="accent1"/>
-              </a:effectRef>
-              <a:fontRef idx="minor">
-                <a:schemeClr val="lt1"/>
-              </a:fontRef>
-            </p:style>
-            <p:txBody>
-              <a:bodyPr rtlCol="0" anchor="ctr"/>
-              <a:lstStyle/>
-              <a:p>
-                <a:pPr algn="ctr"/>
-                <a:r>
-                  <a:rPr lang="en-US" dirty="0">
-                    <a:solidFill>
-                      <a:srgbClr val="002060"/>
-                    </a:solidFill>
-                  </a:rPr>
-                  <a:t>Entry condition: the Lindhard angle </a:t>
-                </a:r>
-                <a14:m>
-                  <m:oMath xmlns:m="http://schemas.openxmlformats.org/officeDocument/2006/math">
-                    <m:sSub>
-                      <m:sSubPr>
-                        <m:ctrlPr>
-                          <a:rPr lang="en-US" b="0" i="1" smtClean="0">
-                            <a:solidFill>
-                              <a:srgbClr val="002060"/>
-                            </a:solidFill>
-                            <a:latin typeface="Cambria Math" panose="02040503050406030204" pitchFamily="18" charset="0"/>
-                          </a:rPr>
-                        </m:ctrlPr>
-                      </m:sSubPr>
-                      <m:e>
-                        <m:r>
-                          <a:rPr lang="en-US" b="0" i="1" smtClean="0">
-                            <a:solidFill>
-                              <a:srgbClr val="002060"/>
-                            </a:solidFill>
-                            <a:latin typeface="Cambria Math" panose="02040503050406030204" pitchFamily="18" charset="0"/>
-                          </a:rPr>
-                          <m:t>𝜃</m:t>
-                        </m:r>
-                      </m:e>
-                      <m:sub>
-                        <m:r>
-                          <a:rPr lang="en-US" b="0" i="1" smtClean="0">
-                            <a:solidFill>
-                              <a:srgbClr val="002060"/>
-                            </a:solidFill>
-                            <a:latin typeface="Cambria Math" panose="02040503050406030204" pitchFamily="18" charset="0"/>
-                          </a:rPr>
-                          <m:t>𝐿</m:t>
-                        </m:r>
-                      </m:sub>
-                    </m:sSub>
-                  </m:oMath>
-                </a14:m>
-                <a:endParaRPr lang="it-IT" dirty="0">
-                  <a:solidFill>
-                    <a:srgbClr val="002060"/>
-                  </a:solidFill>
-                </a:endParaRPr>
-              </a:p>
-              <a:p>
-                <a:pPr algn="ctr"/>
-                <a:r>
-                  <a:rPr lang="it-IT" dirty="0">
-                    <a:solidFill>
-                      <a:schemeClr val="tx1"/>
-                    </a:solidFill>
-                  </a:rPr>
-                  <a:t>incident angle  </a:t>
-                </a:r>
-                <a14:m>
-                  <m:oMath xmlns:m="http://schemas.openxmlformats.org/officeDocument/2006/math">
-                    <m:r>
-                      <a:rPr lang="it-IT">
-                        <a:solidFill>
-                          <a:schemeClr val="tx1"/>
-                        </a:solidFill>
-                        <a:latin typeface="Cambria Math" panose="02040503050406030204" pitchFamily="18" charset="0"/>
-                      </a:rPr>
-                      <m:t>&lt;</m:t>
-                    </m:r>
-                    <m:r>
-                      <a:rPr lang="en-US" b="0" i="1" smtClean="0">
-                        <a:solidFill>
-                          <a:schemeClr val="tx1"/>
-                        </a:solidFill>
-                        <a:latin typeface="Cambria Math" panose="02040503050406030204" pitchFamily="18" charset="0"/>
-                      </a:rPr>
-                      <m:t>±1/2</m:t>
-                    </m:r>
-                    <m:sSub>
-                      <m:sSubPr>
-                        <m:ctrlPr>
-                          <a:rPr lang="en-US" b="0" i="1" smtClean="0">
-                            <a:solidFill>
-                              <a:schemeClr val="tx1"/>
-                            </a:solidFill>
-                            <a:latin typeface="Cambria Math" panose="02040503050406030204" pitchFamily="18" charset="0"/>
-                          </a:rPr>
-                        </m:ctrlPr>
-                      </m:sSubPr>
-                      <m:e>
-                        <m:r>
-                          <a:rPr lang="en-US" b="0" i="1" smtClean="0">
-                            <a:solidFill>
-                              <a:schemeClr val="tx1"/>
-                            </a:solidFill>
-                            <a:latin typeface="Cambria Math" panose="02040503050406030204" pitchFamily="18" charset="0"/>
-                          </a:rPr>
-                          <m:t> </m:t>
-                        </m:r>
-                        <m:r>
-                          <a:rPr lang="en-US" b="0" i="1" smtClean="0">
-                            <a:solidFill>
-                              <a:schemeClr val="tx1"/>
-                            </a:solidFill>
-                            <a:latin typeface="Cambria Math" panose="02040503050406030204" pitchFamily="18" charset="0"/>
-                          </a:rPr>
-                          <m:t>𝜃</m:t>
-                        </m:r>
-                      </m:e>
-                      <m:sub>
-                        <m:r>
-                          <a:rPr lang="en-US" b="0" i="1" smtClean="0">
-                            <a:solidFill>
-                              <a:schemeClr val="tx1"/>
-                            </a:solidFill>
-                            <a:latin typeface="Cambria Math" panose="02040503050406030204" pitchFamily="18" charset="0"/>
-                          </a:rPr>
-                          <m:t>𝐿</m:t>
-                        </m:r>
-                      </m:sub>
-                    </m:sSub>
-                  </m:oMath>
-                </a14:m>
-                <a:endParaRPr lang="en-US" b="0" dirty="0">
-                  <a:solidFill>
-                    <a:schemeClr val="tx1"/>
-                  </a:solidFill>
-                </a:endParaRPr>
-              </a:p>
-              <a:p>
-                <a:pPr algn="ctr"/>
-                <a14:m>
-                  <m:oMathPara xmlns:m="http://schemas.openxmlformats.org/officeDocument/2006/math">
-                    <m:oMath>
-                      <m:r>
-                        <a:rPr lang="en-US" b="0" i="1" dirty="0" smtClean="0">
-                          <a:solidFill>
-                            <a:schemeClr val="tx1"/>
-                          </a:solidFill>
-                          <a:latin typeface="Cambria Math" panose="02040503050406030204" pitchFamily="18" charset="0"/>
-                          <a:ea typeface="Cambria Math" panose="02040503050406030204" pitchFamily="18" charset="0"/>
-                        </a:rPr>
-                        <m:t>≈</m:t>
-                      </m:r>
-                      <m:r>
-                        <a:rPr lang="en-US" b="0" i="1" dirty="0" smtClean="0">
-                          <a:solidFill>
-                            <a:schemeClr val="tx1"/>
-                          </a:solidFill>
-                          <a:latin typeface="Cambria Math" panose="02040503050406030204" pitchFamily="18" charset="0"/>
-                        </a:rPr>
-                        <m:t>13 </m:t>
-                      </m:r>
-                      <m:r>
-                        <a:rPr lang="en-US" b="0" i="1" dirty="0" smtClean="0">
-                          <a:solidFill>
-                            <a:schemeClr val="tx1"/>
-                          </a:solidFill>
-                          <a:latin typeface="Cambria Math" panose="02040503050406030204" pitchFamily="18" charset="0"/>
-                        </a:rPr>
-                        <m:t>𝜇</m:t>
-                      </m:r>
-                      <m:r>
-                        <m:rPr>
-                          <m:sty m:val="p"/>
-                        </m:rPr>
-                        <a:rPr lang="en-US" b="0" i="0" dirty="0" smtClean="0">
-                          <a:solidFill>
-                            <a:schemeClr val="tx1"/>
-                          </a:solidFill>
-                          <a:latin typeface="Cambria Math" panose="02040503050406030204" pitchFamily="18" charset="0"/>
-                        </a:rPr>
-                        <m:t>rad</m:t>
-                      </m:r>
-                      <m:r>
-                        <a:rPr lang="en-US" b="0" i="1" dirty="0" smtClean="0">
-                          <a:solidFill>
-                            <a:schemeClr val="tx1"/>
-                          </a:solidFill>
-                          <a:latin typeface="Cambria Math" panose="02040503050406030204" pitchFamily="18" charset="0"/>
-                        </a:rPr>
-                        <m:t> @ 180 </m:t>
-                      </m:r>
-                      <m:r>
-                        <m:rPr>
-                          <m:sty m:val="p"/>
-                        </m:rPr>
-                        <a:rPr lang="en-US" b="0" i="0" dirty="0" smtClean="0">
-                          <a:solidFill>
-                            <a:schemeClr val="tx1"/>
-                          </a:solidFill>
-                          <a:latin typeface="Cambria Math" panose="02040503050406030204" pitchFamily="18" charset="0"/>
-                        </a:rPr>
-                        <m:t>GeV</m:t>
-                      </m:r>
-                    </m:oMath>
-                  </m:oMathPara>
-                </a14:m>
-                <a:endParaRPr lang="en-US" b="0" dirty="0">
-                  <a:solidFill>
-                    <a:schemeClr val="tx1"/>
-                  </a:solidFill>
-                </a:endParaRPr>
-              </a:p>
-            </p:txBody>
-          </p:sp>
-        </mc:Choice>
-        <mc:Fallback xmlns="">
-          <p:sp>
-            <p:nvSpPr>
-              <p:cNvPr id="14" name="Rectangle: Rounded Corners 13">
-                <a:extLst>
-                  <a:ext uri="{FF2B5EF4-FFF2-40B4-BE49-F238E27FC236}">
-                    <a16:creationId xmlns:a16="http://schemas.microsoft.com/office/drawing/2014/main" id="{98F58A1D-BBB1-3327-58AE-595497BB6ABB}"/>
-                  </a:ext>
-                </a:extLst>
-              </p:cNvPr>
-              <p:cNvSpPr>
-                <a:spLocks noRot="1" noChangeAspect="1" noMove="1" noResize="1" noEditPoints="1" noAdjustHandles="1" noChangeArrowheads="1" noChangeShapeType="1" noTextEdit="1"/>
-              </p:cNvSpPr>
-              <p:nvPr/>
-            </p:nvSpPr>
-            <p:spPr>
-              <a:xfrm>
-                <a:off x="838200" y="4966636"/>
-                <a:ext cx="6121399" cy="1203121"/>
-              </a:xfrm>
-              <a:prstGeom prst="roundRect">
-                <a:avLst>
-                  <a:gd name="adj" fmla="val 37357"/>
-                </a:avLst>
-              </a:prstGeom>
-              <a:blipFill>
-                <a:blip r:embed="rId7"/>
-                <a:stretch>
-                  <a:fillRect/>
-                </a:stretch>
-              </a:blipFill>
-              <a:ln w="38100">
-                <a:solidFill>
-                  <a:srgbClr val="002060"/>
-                </a:solidFill>
-              </a:ln>
-            </p:spPr>
-            <p:txBody>
-              <a:bodyPr/>
-              <a:lstStyle/>
-              <a:p>
-                <a:r>
-                  <a:rPr lang="it-IT">
-                    <a:noFill/>
-                  </a:rPr>
-                  <a:t> </a:t>
-                </a:r>
-              </a:p>
-            </p:txBody>
-          </p:sp>
-        </mc:Fallback>
-      </mc:AlternateContent>
-      <p:pic>
-        <p:nvPicPr>
-          <p:cNvPr id="16" name="Picture 15">
-            <a:extLst>
-              <a:ext uri="{FF2B5EF4-FFF2-40B4-BE49-F238E27FC236}">
-                <a16:creationId xmlns:a16="http://schemas.microsoft.com/office/drawing/2014/main" id="{82ED3292-D68F-B234-8F5B-AD34F859AF14}"/>
-              </a:ext>
-            </a:extLst>
-          </p:cNvPr>
-          <p:cNvPicPr>
-            <a:picLocks noChangeAspect="1"/>
-          </p:cNvPicPr>
-          <p:nvPr/>
-        </p:nvPicPr>
-        <p:blipFill>
-          <a:blip r:embed="rId8"/>
-          <a:stretch>
-            <a:fillRect/>
-          </a:stretch>
-        </p:blipFill>
-        <p:spPr>
-          <a:xfrm>
-            <a:off x="12546988" y="3995696"/>
-            <a:ext cx="2422692" cy="1572500"/>
-          </a:xfrm>
-          <a:prstGeom prst="rect">
-            <a:avLst/>
-          </a:prstGeom>
-        </p:spPr>
-      </p:pic>
-    </p:spTree>
-    <p:extLst>
-      <p:ext uri="{BB962C8B-B14F-4D97-AF65-F5344CB8AC3E}">
-        <p14:creationId xmlns:p14="http://schemas.microsoft.com/office/powerpoint/2010/main" val="3483749309"/>
-      </p:ext>
-    </p:extLst>
-  </p:cSld>
-  <p:clrMapOvr>
-    <a:masterClrMapping/>
-  </p:clrMapOvr>
-</p:sld>
-</file>
-
-<file path=ppt/slides/slide20.xml><?xml version="1.0" encoding="utf-8"?>
+<file path=ppt/slides/slide21.xml><?xml version="1.0" encoding="utf-8"?>
 <p:sld xmlns:a="http://schemas.openxmlformats.org/drawingml/2006/main" xmlns:r="http://schemas.openxmlformats.org/officeDocument/2006/relationships" xmlns:p="http://schemas.openxmlformats.org/presentationml/2006/main">
   <p:cSld>
     <p:spTree>
@@ -21547,7 +21789,7 @@
                   <a:srgbClr val="002060"/>
                 </a:solidFill>
               </a:rPr>
-              <a:t>20</a:t>
+              <a:t>21</a:t>
             </a:fld>
             <a:endParaRPr lang="it-IT" sz="1500" b="1" dirty="0">
               <a:solidFill>
@@ -21748,7 +21990,7 @@
 </p:sld>
 </file>
 
-<file path=ppt/slides/slide21.xml><?xml version="1.0" encoding="utf-8"?>
+<file path=ppt/slides/slide22.xml><?xml version="1.0" encoding="utf-8"?>
 <p:sld xmlns:a="http://schemas.openxmlformats.org/drawingml/2006/main" xmlns:r="http://schemas.openxmlformats.org/officeDocument/2006/relationships" xmlns:p="http://schemas.openxmlformats.org/presentationml/2006/main">
   <p:cSld>
     <p:spTree>
@@ -21922,7 +22164,7 @@
                   <a:srgbClr val="002060"/>
                 </a:solidFill>
               </a:rPr>
-              <a:t>21</a:t>
+              <a:t>22</a:t>
             </a:fld>
             <a:endParaRPr lang="it-IT" sz="1500" b="1" dirty="0">
               <a:solidFill>
@@ -23161,7 +23403,7 @@
 </p:sld>
 </file>
 
-<file path=ppt/slides/slide22.xml><?xml version="1.0" encoding="utf-8"?>
+<file path=ppt/slides/slide23.xml><?xml version="1.0" encoding="utf-8"?>
 <p:sld xmlns:a="http://schemas.openxmlformats.org/drawingml/2006/main" xmlns:r="http://schemas.openxmlformats.org/officeDocument/2006/relationships" xmlns:p="http://schemas.openxmlformats.org/presentationml/2006/main">
   <p:cSld>
     <p:spTree>
@@ -23493,7 +23735,7 @@
                   <a:srgbClr val="002060"/>
                 </a:solidFill>
               </a:rPr>
-              <a:t>22</a:t>
+              <a:t>23</a:t>
             </a:fld>
             <a:endParaRPr lang="it-IT" sz="1500" b="1" dirty="0">
               <a:solidFill>
@@ -24256,8 +24498,8 @@
           </a:p>
         </p:txBody>
       </p:sp>
-      <mc:AlternateContent xmlns:mc="http://schemas.openxmlformats.org/markup-compatibility/2006">
-        <mc:Choice xmlns:a14="http://schemas.microsoft.com/office/drawing/2010/main" Requires="a14">
+      <mc:AlternateContent xmlns:mc="http://schemas.openxmlformats.org/markup-compatibility/2006" xmlns:a14="http://schemas.microsoft.com/office/drawing/2010/main">
+        <mc:Choice Requires="a14">
           <p:sp>
             <p:nvSpPr>
               <p:cNvPr id="22" name="Rettangolo con angoli arrotondati 6">
@@ -24432,7 +24674,7 @@
             </p:txBody>
           </p:sp>
         </mc:Choice>
-        <mc:Fallback>
+        <mc:Fallback xmlns="">
           <p:sp>
             <p:nvSpPr>
               <p:cNvPr id="22" name="Rettangolo con angoli arrotondati 6">
